--- a/output/slide_v0.pptx
+++ b/output/slide_v0.pptx
@@ -857,7 +857,7 @@
     <p:bg>
       <p:bgPr>
         <a:solidFill>
-          <a:srgbClr val="0A1628"/>
+          <a:srgbClr val="1A1A2E"/>
         </a:solidFill>
       </p:bgPr>
     </p:bg>
@@ -884,7 +884,7 @@
         <p:spPr>
           <a:xfrm>
             <a:off x="457200" y="274320"/>
-            <a:ext cx="8229600" cy="548640"/>
+            <a:ext cx="8229600" cy="731520"/>
           </a:xfrm>
           <a:prstGeom prst="rect">
             <a:avLst/>
@@ -900,17 +900,17 @@
               <a:buNone/>
             </a:pPr>
             <a:r>
-              <a:rPr lang="en-US" sz="2400" b="1" dirty="0">
+              <a:rPr lang="en-US" sz="3600" b="1" dirty="0">
                 <a:solidFill>
-                  <a:srgbClr val="FFFFFF"/>
+                  <a:srgbClr val="02C39A"/>
                 </a:solidFill>
                 <a:latin typeface="Georgia" pitchFamily="34" charset="0"/>
                 <a:ea typeface="Georgia" pitchFamily="34" charset="-122"/>
                 <a:cs typeface="Georgia" pitchFamily="34" charset="-120"/>
               </a:rPr>
-              <a:t>Dutch Hydrogen Strategy (2020–2035)</a:t>
+              <a:t>Hydrogen Production Methods Comparison</a:t>
             </a:r>
-            <a:endParaRPr lang="en-US" sz="2400" dirty="0"/>
+            <a:endParaRPr lang="en-US" sz="3600" dirty="0"/>
           </a:p>
         </p:txBody>
       </p:sp>
@@ -922,8 +922,8 @@
         </p:nvSpPr>
         <p:spPr>
           <a:xfrm>
-            <a:off x="457200" y="777240"/>
-            <a:ext cx="8229600" cy="274320"/>
+            <a:off x="457200" y="1005840"/>
+            <a:ext cx="8229600" cy="365760"/>
           </a:xfrm>
           <a:prstGeom prst="rect">
             <a:avLst/>
@@ -932,85 +932,2059 @@
           <a:ln/>
         </p:spPr>
         <p:txBody>
-          <a:bodyPr wrap="square" lIns="0" tIns="0" rIns="0" bIns="0" rtlCol="0" anchor="ctr"/>
+          <a:bodyPr wrap="square" rtlCol="0" anchor="ctr"/>
           <a:lstStyle/>
           <a:p>
             <a:pPr indent="0" marL="0">
               <a:buNone/>
             </a:pPr>
             <a:r>
-              <a:rPr lang="en-US" sz="1200" dirty="0">
+              <a:rPr lang="en-US" sz="1400" dirty="0">
                 <a:solidFill>
-                  <a:srgbClr val="00A896"/>
+                  <a:srgbClr val="AAAAAA"/>
                 </a:solidFill>
                 <a:latin typeface="Calibri" pitchFamily="34" charset="0"/>
                 <a:ea typeface="Calibri" pitchFamily="34" charset="-122"/>
                 <a:cs typeface="Calibri" pitchFamily="34" charset="-120"/>
               </a:rPr>
-              <a:t>McKinsey &amp; Company  |  Timeline Overview</a:t>
+              <a:t>Grey, Blue, and Green H2 — Key Characteristics</a:t>
             </a:r>
-            <a:endParaRPr lang="en-US" sz="1200" dirty="0"/>
+            <a:endParaRPr lang="en-US" sz="1400" dirty="0"/>
           </a:p>
         </p:txBody>
       </p:sp>
+      <p:graphicFrame>
+        <p:nvGraphicFramePr>
+          <p:cNvPr id="2" name="Table 0"/>
+          <p:cNvGraphicFramePr>
+            <a:graphicFrameLocks noGrp="1"/>
+          </p:cNvGraphicFramePr>
+          <p:nvPr>
+            <p:extLst>
+              <p:ext uri="{D42A27DB-BD31-4B8C-83A1-F6EECF244321}">
+                <p14:modId xmlns:p14="http://schemas.microsoft.com/office/powerpoint/2010/main" val="1579011935"/>
+              </p:ext>
+            </p:extLst>
+          </p:nvPr>
+        </p:nvGraphicFramePr>
+        <p:xfrm>
+          <a:off x="457200" y="1554480"/>
+          <a:ext cx="8229600" cy="2926080"/>
+        </p:xfrm>
+        <a:graphic>
+          <a:graphicData uri="http://schemas.openxmlformats.org/drawingml/2006/table">
+            <a:tbl>
+              <a:tblPr/>
+              <a:tblGrid>
+                <a:gridCol w="1645920"/>
+                <a:gridCol w="2194560"/>
+                <a:gridCol w="2194560"/>
+                <a:gridCol w="2194560"/>
+              </a:tblGrid>
+              <a:tr h="365760">
+                <a:tc>
+                  <a:txBody>
+                    <a:bodyPr/>
+                    <a:lstStyle/>
+                    <a:p>
+                      <a:pPr algn="ctr" indent="0" marL="0">
+                        <a:buNone/>
+                      </a:pPr>
+                      <a:endParaRPr lang="en-US" sz="1100" dirty="0">
+                        <a:latin typeface="Calibri" charset="0"/>
+                        <a:ea typeface="Calibri" charset="0"/>
+                        <a:cs typeface="Calibri" charset="0"/>
+                      </a:endParaRPr>
+                    </a:p>
+                  </a:txBody>
+                  <a:tcPr marL="91440" marR="91440" marT="45720" marB="45720" anchor="ctr">
+                    <a:lnL w="6350" cap="flat" cmpd="sng" algn="ctr">
+                      <a:solidFill>
+                        <a:srgbClr val="028090"/>
+                      </a:solidFill>
+                      <a:prstDash val="solid"/>
+                      <a:round/>
+                      <a:headEnd type="none" w="med" len="med"/>
+                      <a:tailEnd type="none" w="med" len="med"/>
+                    </a:lnL>
+                    <a:lnR w="6350" cap="flat" cmpd="sng" algn="ctr">
+                      <a:solidFill>
+                        <a:srgbClr val="028090"/>
+                      </a:solidFill>
+                      <a:prstDash val="solid"/>
+                      <a:round/>
+                      <a:headEnd type="none" w="med" len="med"/>
+                      <a:tailEnd type="none" w="med" len="med"/>
+                    </a:lnR>
+                    <a:lnT w="6350" cap="flat" cmpd="sng" algn="ctr">
+                      <a:solidFill>
+                        <a:srgbClr val="028090"/>
+                      </a:solidFill>
+                      <a:prstDash val="solid"/>
+                      <a:round/>
+                      <a:headEnd type="none" w="med" len="med"/>
+                      <a:tailEnd type="none" w="med" len="med"/>
+                    </a:lnT>
+                    <a:lnB w="6350" cap="flat" cmpd="sng" algn="ctr">
+                      <a:solidFill>
+                        <a:srgbClr val="028090"/>
+                      </a:solidFill>
+                      <a:prstDash val="solid"/>
+                      <a:round/>
+                      <a:headEnd type="none" w="med" len="med"/>
+                      <a:tailEnd type="none" w="med" len="med"/>
+                    </a:lnB>
+                    <a:solidFill>
+                      <a:srgbClr val="16213E"/>
+                    </a:solidFill>
+                  </a:tcPr>
+                </a:tc>
+                <a:tc>
+                  <a:txBody>
+                    <a:bodyPr/>
+                    <a:lstStyle/>
+                    <a:p>
+                      <a:pPr algn="ctr" indent="0" marL="0">
+                        <a:buNone/>
+                      </a:pPr>
+                      <a:r>
+                        <a:rPr lang="en-US" sz="1100" b="1" dirty="0">
+                          <a:solidFill>
+                            <a:srgbClr val="FFFFFF"/>
+                          </a:solidFill>
+                          <a:latin typeface="Calibri" pitchFamily="34" charset="0"/>
+                          <a:ea typeface="Calibri" pitchFamily="34" charset="-122"/>
+                          <a:cs typeface="Calibri" pitchFamily="34" charset="-120"/>
+                        </a:rPr>
+                        <a:t>Grey H2</a:t>
+                      </a:r>
+                      <a:endParaRPr lang="en-US" sz="1100" dirty="0">
+                        <a:latin typeface="Calibri" charset="0"/>
+                        <a:ea typeface="Calibri" charset="0"/>
+                        <a:cs typeface="Calibri" charset="0"/>
+                      </a:endParaRPr>
+                    </a:p>
+                  </a:txBody>
+                  <a:tcPr marL="91440" marR="91440" marT="45720" marB="45720" anchor="ctr">
+                    <a:lnL w="6350" cap="flat" cmpd="sng" algn="ctr">
+                      <a:solidFill>
+                        <a:srgbClr val="028090"/>
+                      </a:solidFill>
+                      <a:prstDash val="solid"/>
+                      <a:round/>
+                      <a:headEnd type="none" w="med" len="med"/>
+                      <a:tailEnd type="none" w="med" len="med"/>
+                    </a:lnL>
+                    <a:lnR w="6350" cap="flat" cmpd="sng" algn="ctr">
+                      <a:solidFill>
+                        <a:srgbClr val="028090"/>
+                      </a:solidFill>
+                      <a:prstDash val="solid"/>
+                      <a:round/>
+                      <a:headEnd type="none" w="med" len="med"/>
+                      <a:tailEnd type="none" w="med" len="med"/>
+                    </a:lnR>
+                    <a:lnT w="6350" cap="flat" cmpd="sng" algn="ctr">
+                      <a:solidFill>
+                        <a:srgbClr val="028090"/>
+                      </a:solidFill>
+                      <a:prstDash val="solid"/>
+                      <a:round/>
+                      <a:headEnd type="none" w="med" len="med"/>
+                      <a:tailEnd type="none" w="med" len="med"/>
+                    </a:lnT>
+                    <a:lnB w="6350" cap="flat" cmpd="sng" algn="ctr">
+                      <a:solidFill>
+                        <a:srgbClr val="028090"/>
+                      </a:solidFill>
+                      <a:prstDash val="solid"/>
+                      <a:round/>
+                      <a:headEnd type="none" w="med" len="med"/>
+                      <a:tailEnd type="none" w="med" len="med"/>
+                    </a:lnB>
+                    <a:solidFill>
+                      <a:srgbClr val="028090"/>
+                    </a:solidFill>
+                  </a:tcPr>
+                </a:tc>
+                <a:tc>
+                  <a:txBody>
+                    <a:bodyPr/>
+                    <a:lstStyle/>
+                    <a:p>
+                      <a:pPr algn="ctr" indent="0" marL="0">
+                        <a:buNone/>
+                      </a:pPr>
+                      <a:r>
+                        <a:rPr lang="en-US" sz="1100" b="1" dirty="0">
+                          <a:solidFill>
+                            <a:srgbClr val="FFFFFF"/>
+                          </a:solidFill>
+                          <a:latin typeface="Calibri" pitchFamily="34" charset="0"/>
+                          <a:ea typeface="Calibri" pitchFamily="34" charset="-122"/>
+                          <a:cs typeface="Calibri" pitchFamily="34" charset="-120"/>
+                        </a:rPr>
+                        <a:t>Blue H2</a:t>
+                      </a:r>
+                      <a:endParaRPr lang="en-US" sz="1100" dirty="0">
+                        <a:latin typeface="Calibri" charset="0"/>
+                        <a:ea typeface="Calibri" charset="0"/>
+                        <a:cs typeface="Calibri" charset="0"/>
+                      </a:endParaRPr>
+                    </a:p>
+                  </a:txBody>
+                  <a:tcPr marL="91440" marR="91440" marT="45720" marB="45720" anchor="ctr">
+                    <a:lnL w="6350" cap="flat" cmpd="sng" algn="ctr">
+                      <a:solidFill>
+                        <a:srgbClr val="028090"/>
+                      </a:solidFill>
+                      <a:prstDash val="solid"/>
+                      <a:round/>
+                      <a:headEnd type="none" w="med" len="med"/>
+                      <a:tailEnd type="none" w="med" len="med"/>
+                    </a:lnL>
+                    <a:lnR w="6350" cap="flat" cmpd="sng" algn="ctr">
+                      <a:solidFill>
+                        <a:srgbClr val="028090"/>
+                      </a:solidFill>
+                      <a:prstDash val="solid"/>
+                      <a:round/>
+                      <a:headEnd type="none" w="med" len="med"/>
+                      <a:tailEnd type="none" w="med" len="med"/>
+                    </a:lnR>
+                    <a:lnT w="6350" cap="flat" cmpd="sng" algn="ctr">
+                      <a:solidFill>
+                        <a:srgbClr val="028090"/>
+                      </a:solidFill>
+                      <a:prstDash val="solid"/>
+                      <a:round/>
+                      <a:headEnd type="none" w="med" len="med"/>
+                      <a:tailEnd type="none" w="med" len="med"/>
+                    </a:lnT>
+                    <a:lnB w="6350" cap="flat" cmpd="sng" algn="ctr">
+                      <a:solidFill>
+                        <a:srgbClr val="028090"/>
+                      </a:solidFill>
+                      <a:prstDash val="solid"/>
+                      <a:round/>
+                      <a:headEnd type="none" w="med" len="med"/>
+                      <a:tailEnd type="none" w="med" len="med"/>
+                    </a:lnB>
+                    <a:solidFill>
+                      <a:srgbClr val="028090"/>
+                    </a:solidFill>
+                  </a:tcPr>
+                </a:tc>
+                <a:tc>
+                  <a:txBody>
+                    <a:bodyPr/>
+                    <a:lstStyle/>
+                    <a:p>
+                      <a:pPr algn="ctr" indent="0" marL="0">
+                        <a:buNone/>
+                      </a:pPr>
+                      <a:r>
+                        <a:rPr lang="en-US" sz="1100" b="1" dirty="0">
+                          <a:solidFill>
+                            <a:srgbClr val="FFFFFF"/>
+                          </a:solidFill>
+                          <a:latin typeface="Calibri" pitchFamily="34" charset="0"/>
+                          <a:ea typeface="Calibri" pitchFamily="34" charset="-122"/>
+                          <a:cs typeface="Calibri" pitchFamily="34" charset="-120"/>
+                        </a:rPr>
+                        <a:t>Green H2</a:t>
+                      </a:r>
+                      <a:endParaRPr lang="en-US" sz="1100" dirty="0">
+                        <a:latin typeface="Calibri" charset="0"/>
+                        <a:ea typeface="Calibri" charset="0"/>
+                        <a:cs typeface="Calibri" charset="0"/>
+                      </a:endParaRPr>
+                    </a:p>
+                  </a:txBody>
+                  <a:tcPr marL="91440" marR="91440" marT="45720" marB="45720" anchor="ctr">
+                    <a:lnL w="6350" cap="flat" cmpd="sng" algn="ctr">
+                      <a:solidFill>
+                        <a:srgbClr val="028090"/>
+                      </a:solidFill>
+                      <a:prstDash val="solid"/>
+                      <a:round/>
+                      <a:headEnd type="none" w="med" len="med"/>
+                      <a:tailEnd type="none" w="med" len="med"/>
+                    </a:lnL>
+                    <a:lnR w="6350" cap="flat" cmpd="sng" algn="ctr">
+                      <a:solidFill>
+                        <a:srgbClr val="028090"/>
+                      </a:solidFill>
+                      <a:prstDash val="solid"/>
+                      <a:round/>
+                      <a:headEnd type="none" w="med" len="med"/>
+                      <a:tailEnd type="none" w="med" len="med"/>
+                    </a:lnR>
+                    <a:lnT w="6350" cap="flat" cmpd="sng" algn="ctr">
+                      <a:solidFill>
+                        <a:srgbClr val="028090"/>
+                      </a:solidFill>
+                      <a:prstDash val="solid"/>
+                      <a:round/>
+                      <a:headEnd type="none" w="med" len="med"/>
+                      <a:tailEnd type="none" w="med" len="med"/>
+                    </a:lnT>
+                    <a:lnB w="6350" cap="flat" cmpd="sng" algn="ctr">
+                      <a:solidFill>
+                        <a:srgbClr val="028090"/>
+                      </a:solidFill>
+                      <a:prstDash val="solid"/>
+                      <a:round/>
+                      <a:headEnd type="none" w="med" len="med"/>
+                      <a:tailEnd type="none" w="med" len="med"/>
+                    </a:lnB>
+                    <a:solidFill>
+                      <a:srgbClr val="028090"/>
+                    </a:solidFill>
+                  </a:tcPr>
+                </a:tc>
+              </a:tr>
+              <a:tr h="512064">
+                <a:tc>
+                  <a:txBody>
+                    <a:bodyPr/>
+                    <a:lstStyle/>
+                    <a:p>
+                      <a:pPr indent="0" marL="0">
+                        <a:buNone/>
+                      </a:pPr>
+                      <a:r>
+                        <a:rPr lang="en-US" sz="1100" b="1" dirty="0">
+                          <a:solidFill>
+                            <a:srgbClr val="00A896"/>
+                          </a:solidFill>
+                          <a:latin typeface="Calibri" pitchFamily="34" charset="0"/>
+                          <a:ea typeface="Calibri" pitchFamily="34" charset="-122"/>
+                          <a:cs typeface="Calibri" pitchFamily="34" charset="-120"/>
+                        </a:rPr>
+                        <a:t>Production</a:t>
+                      </a:r>
+                      <a:endParaRPr lang="en-US" sz="1100" dirty="0">
+                        <a:latin typeface="Calibri" charset="0"/>
+                        <a:ea typeface="Calibri" charset="0"/>
+                        <a:cs typeface="Calibri" charset="0"/>
+                      </a:endParaRPr>
+                    </a:p>
+                    <a:p>
+                      <a:pPr indent="0" marL="0">
+                        <a:buNone/>
+                      </a:pPr>
+                      <a:r>
+                        <a:rPr lang="en-US" sz="1100" b="1" dirty="0">
+                          <a:solidFill>
+                            <a:srgbClr val="00A896"/>
+                          </a:solidFill>
+                          <a:latin typeface="Calibri" pitchFamily="34" charset="0"/>
+                          <a:ea typeface="Calibri" pitchFamily="34" charset="-122"/>
+                          <a:cs typeface="Calibri" pitchFamily="34" charset="-120"/>
+                        </a:rPr>
+                        <a:t>process</a:t>
+                      </a:r>
+                      <a:endParaRPr lang="en-US" sz="1100" dirty="0">
+                        <a:latin typeface="Calibri" charset="0"/>
+                        <a:ea typeface="Calibri" charset="0"/>
+                        <a:cs typeface="Calibri" charset="0"/>
+                      </a:endParaRPr>
+                    </a:p>
+                  </a:txBody>
+                  <a:tcPr marL="91440" marR="91440" marT="45720" marB="45720" anchor="ctr">
+                    <a:lnL w="6350" cap="flat" cmpd="sng" algn="ctr">
+                      <a:solidFill>
+                        <a:srgbClr val="028090"/>
+                      </a:solidFill>
+                      <a:prstDash val="solid"/>
+                      <a:round/>
+                      <a:headEnd type="none" w="med" len="med"/>
+                      <a:tailEnd type="none" w="med" len="med"/>
+                    </a:lnL>
+                    <a:lnR w="6350" cap="flat" cmpd="sng" algn="ctr">
+                      <a:solidFill>
+                        <a:srgbClr val="028090"/>
+                      </a:solidFill>
+                      <a:prstDash val="solid"/>
+                      <a:round/>
+                      <a:headEnd type="none" w="med" len="med"/>
+                      <a:tailEnd type="none" w="med" len="med"/>
+                    </a:lnR>
+                    <a:lnT w="6350" cap="flat" cmpd="sng" algn="ctr">
+                      <a:solidFill>
+                        <a:srgbClr val="028090"/>
+                      </a:solidFill>
+                      <a:prstDash val="solid"/>
+                      <a:round/>
+                      <a:headEnd type="none" w="med" len="med"/>
+                      <a:tailEnd type="none" w="med" len="med"/>
+                    </a:lnT>
+                    <a:lnB w="6350" cap="flat" cmpd="sng" algn="ctr">
+                      <a:solidFill>
+                        <a:srgbClr val="028090"/>
+                      </a:solidFill>
+                      <a:prstDash val="solid"/>
+                      <a:round/>
+                      <a:headEnd type="none" w="med" len="med"/>
+                      <a:tailEnd type="none" w="med" len="med"/>
+                    </a:lnB>
+                    <a:solidFill>
+                      <a:srgbClr val="16213E"/>
+                    </a:solidFill>
+                  </a:tcPr>
+                </a:tc>
+                <a:tc>
+                  <a:txBody>
+                    <a:bodyPr/>
+                    <a:lstStyle/>
+                    <a:p>
+                      <a:pPr indent="0" marL="0">
+                        <a:buNone/>
+                      </a:pPr>
+                      <a:r>
+                        <a:rPr lang="en-US" sz="1000" dirty="0">
+                          <a:solidFill>
+                            <a:srgbClr val="CCCCCC"/>
+                          </a:solidFill>
+                          <a:latin typeface="Calibri" pitchFamily="34" charset="0"/>
+                          <a:ea typeface="Calibri" pitchFamily="34" charset="-122"/>
+                          <a:cs typeface="Calibri" pitchFamily="34" charset="-120"/>
+                        </a:rPr>
+                        <a:t>Split natural gas</a:t>
+                      </a:r>
+                      <a:endParaRPr lang="en-US" sz="1000" dirty="0">
+                        <a:latin typeface="Calibri" charset="0"/>
+                        <a:ea typeface="Calibri" charset="0"/>
+                        <a:cs typeface="Calibri" charset="0"/>
+                      </a:endParaRPr>
+                    </a:p>
+                    <a:p>
+                      <a:pPr indent="0" marL="0">
+                        <a:buNone/>
+                      </a:pPr>
+                      <a:r>
+                        <a:rPr lang="en-US" sz="1000" dirty="0">
+                          <a:solidFill>
+                            <a:srgbClr val="CCCCCC"/>
+                          </a:solidFill>
+                          <a:latin typeface="Calibri" pitchFamily="34" charset="0"/>
+                          <a:ea typeface="Calibri" pitchFamily="34" charset="-122"/>
+                          <a:cs typeface="Calibri" pitchFamily="34" charset="-120"/>
+                        </a:rPr>
+                        <a:t>into H2 and CO2</a:t>
+                      </a:r>
+                      <a:endParaRPr lang="en-US" sz="1000" dirty="0">
+                        <a:latin typeface="Calibri" charset="0"/>
+                        <a:ea typeface="Calibri" charset="0"/>
+                        <a:cs typeface="Calibri" charset="0"/>
+                      </a:endParaRPr>
+                    </a:p>
+                  </a:txBody>
+                  <a:tcPr marL="91440" marR="91440" marT="45720" marB="45720" anchor="ctr">
+                    <a:lnL w="6350" cap="flat" cmpd="sng" algn="ctr">
+                      <a:solidFill>
+                        <a:srgbClr val="028090"/>
+                      </a:solidFill>
+                      <a:prstDash val="solid"/>
+                      <a:round/>
+                      <a:headEnd type="none" w="med" len="med"/>
+                      <a:tailEnd type="none" w="med" len="med"/>
+                    </a:lnL>
+                    <a:lnR w="6350" cap="flat" cmpd="sng" algn="ctr">
+                      <a:solidFill>
+                        <a:srgbClr val="028090"/>
+                      </a:solidFill>
+                      <a:prstDash val="solid"/>
+                      <a:round/>
+                      <a:headEnd type="none" w="med" len="med"/>
+                      <a:tailEnd type="none" w="med" len="med"/>
+                    </a:lnR>
+                    <a:lnT w="6350" cap="flat" cmpd="sng" algn="ctr">
+                      <a:solidFill>
+                        <a:srgbClr val="028090"/>
+                      </a:solidFill>
+                      <a:prstDash val="solid"/>
+                      <a:round/>
+                      <a:headEnd type="none" w="med" len="med"/>
+                      <a:tailEnd type="none" w="med" len="med"/>
+                    </a:lnT>
+                    <a:lnB w="6350" cap="flat" cmpd="sng" algn="ctr">
+                      <a:solidFill>
+                        <a:srgbClr val="028090"/>
+                      </a:solidFill>
+                      <a:prstDash val="solid"/>
+                      <a:round/>
+                      <a:headEnd type="none" w="med" len="med"/>
+                      <a:tailEnd type="none" w="med" len="med"/>
+                    </a:lnB>
+                    <a:solidFill>
+                      <a:srgbClr val="16213E"/>
+                    </a:solidFill>
+                  </a:tcPr>
+                </a:tc>
+                <a:tc>
+                  <a:txBody>
+                    <a:bodyPr/>
+                    <a:lstStyle/>
+                    <a:p>
+                      <a:pPr indent="0" marL="0">
+                        <a:buNone/>
+                      </a:pPr>
+                      <a:r>
+                        <a:rPr lang="en-US" sz="1000" dirty="0">
+                          <a:solidFill>
+                            <a:srgbClr val="CCCCCC"/>
+                          </a:solidFill>
+                          <a:latin typeface="Calibri" pitchFamily="34" charset="0"/>
+                          <a:ea typeface="Calibri" pitchFamily="34" charset="-122"/>
+                          <a:cs typeface="Calibri" pitchFamily="34" charset="-120"/>
+                        </a:rPr>
+                        <a:t>Similar to Grey but</a:t>
+                      </a:r>
+                      <a:endParaRPr lang="en-US" sz="1000" dirty="0">
+                        <a:latin typeface="Calibri" charset="0"/>
+                        <a:ea typeface="Calibri" charset="0"/>
+                        <a:cs typeface="Calibri" charset="0"/>
+                      </a:endParaRPr>
+                    </a:p>
+                    <a:p>
+                      <a:pPr indent="0" marL="0">
+                        <a:buNone/>
+                      </a:pPr>
+                      <a:r>
+                        <a:rPr lang="en-US" sz="1000" dirty="0">
+                          <a:solidFill>
+                            <a:srgbClr val="CCCCCC"/>
+                          </a:solidFill>
+                          <a:latin typeface="Calibri" pitchFamily="34" charset="0"/>
+                          <a:ea typeface="Calibri" pitchFamily="34" charset="-122"/>
+                          <a:cs typeface="Calibri" pitchFamily="34" charset="-120"/>
+                        </a:rPr>
+                        <a:t>capture and store CO2</a:t>
+                      </a:r>
+                      <a:endParaRPr lang="en-US" sz="1000" dirty="0">
+                        <a:latin typeface="Calibri" charset="0"/>
+                        <a:ea typeface="Calibri" charset="0"/>
+                        <a:cs typeface="Calibri" charset="0"/>
+                      </a:endParaRPr>
+                    </a:p>
+                  </a:txBody>
+                  <a:tcPr marL="91440" marR="91440" marT="45720" marB="45720" anchor="ctr">
+                    <a:lnL w="6350" cap="flat" cmpd="sng" algn="ctr">
+                      <a:solidFill>
+                        <a:srgbClr val="028090"/>
+                      </a:solidFill>
+                      <a:prstDash val="solid"/>
+                      <a:round/>
+                      <a:headEnd type="none" w="med" len="med"/>
+                      <a:tailEnd type="none" w="med" len="med"/>
+                    </a:lnL>
+                    <a:lnR w="6350" cap="flat" cmpd="sng" algn="ctr">
+                      <a:solidFill>
+                        <a:srgbClr val="028090"/>
+                      </a:solidFill>
+                      <a:prstDash val="solid"/>
+                      <a:round/>
+                      <a:headEnd type="none" w="med" len="med"/>
+                      <a:tailEnd type="none" w="med" len="med"/>
+                    </a:lnR>
+                    <a:lnT w="6350" cap="flat" cmpd="sng" algn="ctr">
+                      <a:solidFill>
+                        <a:srgbClr val="028090"/>
+                      </a:solidFill>
+                      <a:prstDash val="solid"/>
+                      <a:round/>
+                      <a:headEnd type="none" w="med" len="med"/>
+                      <a:tailEnd type="none" w="med" len="med"/>
+                    </a:lnT>
+                    <a:lnB w="6350" cap="flat" cmpd="sng" algn="ctr">
+                      <a:solidFill>
+                        <a:srgbClr val="028090"/>
+                      </a:solidFill>
+                      <a:prstDash val="solid"/>
+                      <a:round/>
+                      <a:headEnd type="none" w="med" len="med"/>
+                      <a:tailEnd type="none" w="med" len="med"/>
+                    </a:lnB>
+                    <a:solidFill>
+                      <a:srgbClr val="16213E"/>
+                    </a:solidFill>
+                  </a:tcPr>
+                </a:tc>
+                <a:tc>
+                  <a:txBody>
+                    <a:bodyPr/>
+                    <a:lstStyle/>
+                    <a:p>
+                      <a:pPr indent="0" marL="0">
+                        <a:buNone/>
+                      </a:pPr>
+                      <a:r>
+                        <a:rPr lang="en-US" sz="1000" dirty="0">
+                          <a:solidFill>
+                            <a:srgbClr val="CCCCCC"/>
+                          </a:solidFill>
+                          <a:latin typeface="Calibri" pitchFamily="34" charset="0"/>
+                          <a:ea typeface="Calibri" pitchFamily="34" charset="-122"/>
+                          <a:cs typeface="Calibri" pitchFamily="34" charset="-120"/>
+                        </a:rPr>
+                        <a:t>Split water into H2 and O2</a:t>
+                      </a:r>
+                      <a:endParaRPr lang="en-US" sz="1000" dirty="0">
+                        <a:latin typeface="Calibri" charset="0"/>
+                        <a:ea typeface="Calibri" charset="0"/>
+                        <a:cs typeface="Calibri" charset="0"/>
+                      </a:endParaRPr>
+                    </a:p>
+                    <a:p>
+                      <a:pPr indent="0" marL="0">
+                        <a:buNone/>
+                      </a:pPr>
+                      <a:r>
+                        <a:rPr lang="en-US" sz="1000" dirty="0">
+                          <a:solidFill>
+                            <a:srgbClr val="CCCCCC"/>
+                          </a:solidFill>
+                          <a:latin typeface="Calibri" pitchFamily="34" charset="0"/>
+                          <a:ea typeface="Calibri" pitchFamily="34" charset="-122"/>
+                          <a:cs typeface="Calibri" pitchFamily="34" charset="-120"/>
+                        </a:rPr>
+                        <a:t>via electrolysis (renewables)</a:t>
+                      </a:r>
+                      <a:endParaRPr lang="en-US" sz="1000" dirty="0">
+                        <a:latin typeface="Calibri" charset="0"/>
+                        <a:ea typeface="Calibri" charset="0"/>
+                        <a:cs typeface="Calibri" charset="0"/>
+                      </a:endParaRPr>
+                    </a:p>
+                  </a:txBody>
+                  <a:tcPr marL="91440" marR="91440" marT="45720" marB="45720" anchor="ctr">
+                    <a:lnL w="6350" cap="flat" cmpd="sng" algn="ctr">
+                      <a:solidFill>
+                        <a:srgbClr val="028090"/>
+                      </a:solidFill>
+                      <a:prstDash val="solid"/>
+                      <a:round/>
+                      <a:headEnd type="none" w="med" len="med"/>
+                      <a:tailEnd type="none" w="med" len="med"/>
+                    </a:lnL>
+                    <a:lnR w="6350" cap="flat" cmpd="sng" algn="ctr">
+                      <a:solidFill>
+                        <a:srgbClr val="028090"/>
+                      </a:solidFill>
+                      <a:prstDash val="solid"/>
+                      <a:round/>
+                      <a:headEnd type="none" w="med" len="med"/>
+                      <a:tailEnd type="none" w="med" len="med"/>
+                    </a:lnR>
+                    <a:lnT w="6350" cap="flat" cmpd="sng" algn="ctr">
+                      <a:solidFill>
+                        <a:srgbClr val="028090"/>
+                      </a:solidFill>
+                      <a:prstDash val="solid"/>
+                      <a:round/>
+                      <a:headEnd type="none" w="med" len="med"/>
+                      <a:tailEnd type="none" w="med" len="med"/>
+                    </a:lnT>
+                    <a:lnB w="6350" cap="flat" cmpd="sng" algn="ctr">
+                      <a:solidFill>
+                        <a:srgbClr val="028090"/>
+                      </a:solidFill>
+                      <a:prstDash val="solid"/>
+                      <a:round/>
+                      <a:headEnd type="none" w="med" len="med"/>
+                      <a:tailEnd type="none" w="med" len="med"/>
+                    </a:lnB>
+                    <a:solidFill>
+                      <a:srgbClr val="16213E"/>
+                    </a:solidFill>
+                  </a:tcPr>
+                </a:tc>
+              </a:tr>
+              <a:tr h="512064">
+                <a:tc>
+                  <a:txBody>
+                    <a:bodyPr/>
+                    <a:lstStyle/>
+                    <a:p>
+                      <a:pPr indent="0" marL="0">
+                        <a:buNone/>
+                      </a:pPr>
+                      <a:r>
+                        <a:rPr lang="en-US" sz="1100" b="1" dirty="0">
+                          <a:solidFill>
+                            <a:srgbClr val="00A896"/>
+                          </a:solidFill>
+                          <a:latin typeface="Calibri" pitchFamily="34" charset="0"/>
+                          <a:ea typeface="Calibri" pitchFamily="34" charset="-122"/>
+                          <a:cs typeface="Calibri" pitchFamily="34" charset="-120"/>
+                        </a:rPr>
+                        <a:t>CO2 emissions</a:t>
+                      </a:r>
+                      <a:endParaRPr lang="en-US" sz="1100" dirty="0">
+                        <a:latin typeface="Calibri" charset="0"/>
+                        <a:ea typeface="Calibri" charset="0"/>
+                        <a:cs typeface="Calibri" charset="0"/>
+                      </a:endParaRPr>
+                    </a:p>
+                    <a:p>
+                      <a:pPr indent="0" marL="0">
+                        <a:buNone/>
+                      </a:pPr>
+                      <a:r>
+                        <a:rPr lang="en-US" sz="1100" b="1" dirty="0">
+                          <a:solidFill>
+                            <a:srgbClr val="00A896"/>
+                          </a:solidFill>
+                          <a:latin typeface="Calibri" pitchFamily="34" charset="0"/>
+                          <a:ea typeface="Calibri" pitchFamily="34" charset="-122"/>
+                          <a:cs typeface="Calibri" pitchFamily="34" charset="-120"/>
+                        </a:rPr>
+                        <a:t>(kg CO2/kgH2)</a:t>
+                      </a:r>
+                      <a:endParaRPr lang="en-US" sz="1100" dirty="0">
+                        <a:latin typeface="Calibri" charset="0"/>
+                        <a:ea typeface="Calibri" charset="0"/>
+                        <a:cs typeface="Calibri" charset="0"/>
+                      </a:endParaRPr>
+                    </a:p>
+                  </a:txBody>
+                  <a:tcPr marL="91440" marR="91440" marT="45720" marB="45720" anchor="ctr">
+                    <a:lnL w="6350" cap="flat" cmpd="sng" algn="ctr">
+                      <a:solidFill>
+                        <a:srgbClr val="028090"/>
+                      </a:solidFill>
+                      <a:prstDash val="solid"/>
+                      <a:round/>
+                      <a:headEnd type="none" w="med" len="med"/>
+                      <a:tailEnd type="none" w="med" len="med"/>
+                    </a:lnL>
+                    <a:lnR w="6350" cap="flat" cmpd="sng" algn="ctr">
+                      <a:solidFill>
+                        <a:srgbClr val="028090"/>
+                      </a:solidFill>
+                      <a:prstDash val="solid"/>
+                      <a:round/>
+                      <a:headEnd type="none" w="med" len="med"/>
+                      <a:tailEnd type="none" w="med" len="med"/>
+                    </a:lnR>
+                    <a:lnT w="6350" cap="flat" cmpd="sng" algn="ctr">
+                      <a:solidFill>
+                        <a:srgbClr val="028090"/>
+                      </a:solidFill>
+                      <a:prstDash val="solid"/>
+                      <a:round/>
+                      <a:headEnd type="none" w="med" len="med"/>
+                      <a:tailEnd type="none" w="med" len="med"/>
+                    </a:lnT>
+                    <a:lnB w="6350" cap="flat" cmpd="sng" algn="ctr">
+                      <a:solidFill>
+                        <a:srgbClr val="028090"/>
+                      </a:solidFill>
+                      <a:prstDash val="solid"/>
+                      <a:round/>
+                      <a:headEnd type="none" w="med" len="med"/>
+                      <a:tailEnd type="none" w="med" len="med"/>
+                    </a:lnB>
+                    <a:solidFill>
+                      <a:srgbClr val="16213E"/>
+                    </a:solidFill>
+                  </a:tcPr>
+                </a:tc>
+                <a:tc>
+                  <a:txBody>
+                    <a:bodyPr/>
+                    <a:lstStyle/>
+                    <a:p>
+                      <a:pPr indent="0" marL="0">
+                        <a:buNone/>
+                      </a:pPr>
+                      <a:r>
+                        <a:rPr lang="en-US" sz="1000" dirty="0">
+                          <a:solidFill>
+                            <a:srgbClr val="CCCCCC"/>
+                          </a:solidFill>
+                          <a:latin typeface="Calibri" pitchFamily="34" charset="0"/>
+                          <a:ea typeface="Calibri" pitchFamily="34" charset="-122"/>
+                          <a:cs typeface="Calibri" pitchFamily="34" charset="-120"/>
+                        </a:rPr>
+                        <a:t>~10</a:t>
+                      </a:r>
+                      <a:endParaRPr lang="en-US" sz="1000" dirty="0">
+                        <a:latin typeface="Calibri" charset="0"/>
+                        <a:ea typeface="Calibri" charset="0"/>
+                        <a:cs typeface="Calibri" charset="0"/>
+                      </a:endParaRPr>
+                    </a:p>
+                  </a:txBody>
+                  <a:tcPr marL="91440" marR="91440" marT="45720" marB="45720" anchor="ctr">
+                    <a:lnL w="6350" cap="flat" cmpd="sng" algn="ctr">
+                      <a:solidFill>
+                        <a:srgbClr val="028090"/>
+                      </a:solidFill>
+                      <a:prstDash val="solid"/>
+                      <a:round/>
+                      <a:headEnd type="none" w="med" len="med"/>
+                      <a:tailEnd type="none" w="med" len="med"/>
+                    </a:lnL>
+                    <a:lnR w="6350" cap="flat" cmpd="sng" algn="ctr">
+                      <a:solidFill>
+                        <a:srgbClr val="028090"/>
+                      </a:solidFill>
+                      <a:prstDash val="solid"/>
+                      <a:round/>
+                      <a:headEnd type="none" w="med" len="med"/>
+                      <a:tailEnd type="none" w="med" len="med"/>
+                    </a:lnR>
+                    <a:lnT w="6350" cap="flat" cmpd="sng" algn="ctr">
+                      <a:solidFill>
+                        <a:srgbClr val="028090"/>
+                      </a:solidFill>
+                      <a:prstDash val="solid"/>
+                      <a:round/>
+                      <a:headEnd type="none" w="med" len="med"/>
+                      <a:tailEnd type="none" w="med" len="med"/>
+                    </a:lnT>
+                    <a:lnB w="6350" cap="flat" cmpd="sng" algn="ctr">
+                      <a:solidFill>
+                        <a:srgbClr val="028090"/>
+                      </a:solidFill>
+                      <a:prstDash val="solid"/>
+                      <a:round/>
+                      <a:headEnd type="none" w="med" len="med"/>
+                      <a:tailEnd type="none" w="med" len="med"/>
+                    </a:lnB>
+                    <a:solidFill>
+                      <a:srgbClr val="1A1A3E"/>
+                    </a:solidFill>
+                  </a:tcPr>
+                </a:tc>
+                <a:tc>
+                  <a:txBody>
+                    <a:bodyPr/>
+                    <a:lstStyle/>
+                    <a:p>
+                      <a:pPr indent="0" marL="0">
+                        <a:buNone/>
+                      </a:pPr>
+                      <a:r>
+                        <a:rPr lang="en-US" sz="1000" dirty="0">
+                          <a:solidFill>
+                            <a:srgbClr val="CCCCCC"/>
+                          </a:solidFill>
+                          <a:latin typeface="Calibri" pitchFamily="34" charset="0"/>
+                          <a:ea typeface="Calibri" pitchFamily="34" charset="-122"/>
+                          <a:cs typeface="Calibri" pitchFamily="34" charset="-120"/>
+                        </a:rPr>
+                        <a:t>~1-3</a:t>
+                      </a:r>
+                      <a:endParaRPr lang="en-US" sz="1000" dirty="0">
+                        <a:latin typeface="Calibri" charset="0"/>
+                        <a:ea typeface="Calibri" charset="0"/>
+                        <a:cs typeface="Calibri" charset="0"/>
+                      </a:endParaRPr>
+                    </a:p>
+                    <a:p>
+                      <a:pPr indent="0" marL="0">
+                        <a:buNone/>
+                      </a:pPr>
+                      <a:r>
+                        <a:rPr lang="en-US" sz="1000" dirty="0">
+                          <a:solidFill>
+                            <a:srgbClr val="CCCCCC"/>
+                          </a:solidFill>
+                          <a:latin typeface="Calibri" pitchFamily="34" charset="0"/>
+                          <a:ea typeface="Calibri" pitchFamily="34" charset="-122"/>
+                          <a:cs typeface="Calibri" pitchFamily="34" charset="-120"/>
+                        </a:rPr>
+                        <a:t>(most CO2 stored)</a:t>
+                      </a:r>
+                      <a:endParaRPr lang="en-US" sz="1000" dirty="0">
+                        <a:latin typeface="Calibri" charset="0"/>
+                        <a:ea typeface="Calibri" charset="0"/>
+                        <a:cs typeface="Calibri" charset="0"/>
+                      </a:endParaRPr>
+                    </a:p>
+                  </a:txBody>
+                  <a:tcPr marL="91440" marR="91440" marT="45720" marB="45720" anchor="ctr">
+                    <a:lnL w="6350" cap="flat" cmpd="sng" algn="ctr">
+                      <a:solidFill>
+                        <a:srgbClr val="028090"/>
+                      </a:solidFill>
+                      <a:prstDash val="solid"/>
+                      <a:round/>
+                      <a:headEnd type="none" w="med" len="med"/>
+                      <a:tailEnd type="none" w="med" len="med"/>
+                    </a:lnL>
+                    <a:lnR w="6350" cap="flat" cmpd="sng" algn="ctr">
+                      <a:solidFill>
+                        <a:srgbClr val="028090"/>
+                      </a:solidFill>
+                      <a:prstDash val="solid"/>
+                      <a:round/>
+                      <a:headEnd type="none" w="med" len="med"/>
+                      <a:tailEnd type="none" w="med" len="med"/>
+                    </a:lnR>
+                    <a:lnT w="6350" cap="flat" cmpd="sng" algn="ctr">
+                      <a:solidFill>
+                        <a:srgbClr val="028090"/>
+                      </a:solidFill>
+                      <a:prstDash val="solid"/>
+                      <a:round/>
+                      <a:headEnd type="none" w="med" len="med"/>
+                      <a:tailEnd type="none" w="med" len="med"/>
+                    </a:lnT>
+                    <a:lnB w="6350" cap="flat" cmpd="sng" algn="ctr">
+                      <a:solidFill>
+                        <a:srgbClr val="028090"/>
+                      </a:solidFill>
+                      <a:prstDash val="solid"/>
+                      <a:round/>
+                      <a:headEnd type="none" w="med" len="med"/>
+                      <a:tailEnd type="none" w="med" len="med"/>
+                    </a:lnB>
+                    <a:solidFill>
+                      <a:srgbClr val="1A1A3E"/>
+                    </a:solidFill>
+                  </a:tcPr>
+                </a:tc>
+                <a:tc>
+                  <a:txBody>
+                    <a:bodyPr/>
+                    <a:lstStyle/>
+                    <a:p>
+                      <a:pPr indent="0" marL="0">
+                        <a:buNone/>
+                      </a:pPr>
+                      <a:r>
+                        <a:rPr lang="en-US" sz="1000" dirty="0">
+                          <a:solidFill>
+                            <a:srgbClr val="CCCCCC"/>
+                          </a:solidFill>
+                          <a:latin typeface="Calibri" pitchFamily="34" charset="0"/>
+                          <a:ea typeface="Calibri" pitchFamily="34" charset="-122"/>
+                          <a:cs typeface="Calibri" pitchFamily="34" charset="-120"/>
+                        </a:rPr>
+                        <a:t>~0</a:t>
+                      </a:r>
+                      <a:endParaRPr lang="en-US" sz="1000" dirty="0">
+                        <a:latin typeface="Calibri" charset="0"/>
+                        <a:ea typeface="Calibri" charset="0"/>
+                        <a:cs typeface="Calibri" charset="0"/>
+                      </a:endParaRPr>
+                    </a:p>
+                    <a:p>
+                      <a:pPr indent="0" marL="0">
+                        <a:buNone/>
+                      </a:pPr>
+                      <a:r>
+                        <a:rPr lang="en-US" sz="1000" dirty="0">
+                          <a:solidFill>
+                            <a:srgbClr val="CCCCCC"/>
+                          </a:solidFill>
+                          <a:latin typeface="Calibri" pitchFamily="34" charset="0"/>
+                          <a:ea typeface="Calibri" pitchFamily="34" charset="-122"/>
+                          <a:cs typeface="Calibri" pitchFamily="34" charset="-120"/>
+                        </a:rPr>
+                        <a:t>(assuming green mix)</a:t>
+                      </a:r>
+                      <a:endParaRPr lang="en-US" sz="1000" dirty="0">
+                        <a:latin typeface="Calibri" charset="0"/>
+                        <a:ea typeface="Calibri" charset="0"/>
+                        <a:cs typeface="Calibri" charset="0"/>
+                      </a:endParaRPr>
+                    </a:p>
+                  </a:txBody>
+                  <a:tcPr marL="91440" marR="91440" marT="45720" marB="45720" anchor="ctr">
+                    <a:lnL w="6350" cap="flat" cmpd="sng" algn="ctr">
+                      <a:solidFill>
+                        <a:srgbClr val="028090"/>
+                      </a:solidFill>
+                      <a:prstDash val="solid"/>
+                      <a:round/>
+                      <a:headEnd type="none" w="med" len="med"/>
+                      <a:tailEnd type="none" w="med" len="med"/>
+                    </a:lnL>
+                    <a:lnR w="6350" cap="flat" cmpd="sng" algn="ctr">
+                      <a:solidFill>
+                        <a:srgbClr val="028090"/>
+                      </a:solidFill>
+                      <a:prstDash val="solid"/>
+                      <a:round/>
+                      <a:headEnd type="none" w="med" len="med"/>
+                      <a:tailEnd type="none" w="med" len="med"/>
+                    </a:lnR>
+                    <a:lnT w="6350" cap="flat" cmpd="sng" algn="ctr">
+                      <a:solidFill>
+                        <a:srgbClr val="028090"/>
+                      </a:solidFill>
+                      <a:prstDash val="solid"/>
+                      <a:round/>
+                      <a:headEnd type="none" w="med" len="med"/>
+                      <a:tailEnd type="none" w="med" len="med"/>
+                    </a:lnT>
+                    <a:lnB w="6350" cap="flat" cmpd="sng" algn="ctr">
+                      <a:solidFill>
+                        <a:srgbClr val="028090"/>
+                      </a:solidFill>
+                      <a:prstDash val="solid"/>
+                      <a:round/>
+                      <a:headEnd type="none" w="med" len="med"/>
+                      <a:tailEnd type="none" w="med" len="med"/>
+                    </a:lnB>
+                    <a:solidFill>
+                      <a:srgbClr val="1A1A3E"/>
+                    </a:solidFill>
+                  </a:tcPr>
+                </a:tc>
+              </a:tr>
+              <a:tr h="512064">
+                <a:tc>
+                  <a:txBody>
+                    <a:bodyPr/>
+                    <a:lstStyle/>
+                    <a:p>
+                      <a:pPr indent="0" marL="0">
+                        <a:buNone/>
+                      </a:pPr>
+                      <a:r>
+                        <a:rPr lang="en-US" sz="1100" b="1" dirty="0">
+                          <a:solidFill>
+                            <a:srgbClr val="00A896"/>
+                          </a:solidFill>
+                          <a:latin typeface="Calibri" pitchFamily="34" charset="0"/>
+                          <a:ea typeface="Calibri" pitchFamily="34" charset="-122"/>
+                          <a:cs typeface="Calibri" pitchFamily="34" charset="-120"/>
+                        </a:rPr>
+                        <a:t>Investment</a:t>
+                      </a:r>
+                      <a:endParaRPr lang="en-US" sz="1100" dirty="0">
+                        <a:latin typeface="Calibri" charset="0"/>
+                        <a:ea typeface="Calibri" charset="0"/>
+                        <a:cs typeface="Calibri" charset="0"/>
+                      </a:endParaRPr>
+                    </a:p>
+                    <a:p>
+                      <a:pPr indent="0" marL="0">
+                        <a:buNone/>
+                      </a:pPr>
+                      <a:r>
+                        <a:rPr lang="en-US" sz="1100" b="1" dirty="0">
+                          <a:solidFill>
+                            <a:srgbClr val="00A896"/>
+                          </a:solidFill>
+                          <a:latin typeface="Calibri" pitchFamily="34" charset="0"/>
+                          <a:ea typeface="Calibri" pitchFamily="34" charset="-122"/>
+                          <a:cs typeface="Calibri" pitchFamily="34" charset="-120"/>
+                        </a:rPr>
+                        <a:t>scale</a:t>
+                      </a:r>
+                      <a:endParaRPr lang="en-US" sz="1100" dirty="0">
+                        <a:latin typeface="Calibri" charset="0"/>
+                        <a:ea typeface="Calibri" charset="0"/>
+                        <a:cs typeface="Calibri" charset="0"/>
+                      </a:endParaRPr>
+                    </a:p>
+                  </a:txBody>
+                  <a:tcPr marL="91440" marR="91440" marT="45720" marB="45720" anchor="ctr">
+                    <a:lnL w="6350" cap="flat" cmpd="sng" algn="ctr">
+                      <a:solidFill>
+                        <a:srgbClr val="028090"/>
+                      </a:solidFill>
+                      <a:prstDash val="solid"/>
+                      <a:round/>
+                      <a:headEnd type="none" w="med" len="med"/>
+                      <a:tailEnd type="none" w="med" len="med"/>
+                    </a:lnL>
+                    <a:lnR w="6350" cap="flat" cmpd="sng" algn="ctr">
+                      <a:solidFill>
+                        <a:srgbClr val="028090"/>
+                      </a:solidFill>
+                      <a:prstDash val="solid"/>
+                      <a:round/>
+                      <a:headEnd type="none" w="med" len="med"/>
+                      <a:tailEnd type="none" w="med" len="med"/>
+                    </a:lnR>
+                    <a:lnT w="6350" cap="flat" cmpd="sng" algn="ctr">
+                      <a:solidFill>
+                        <a:srgbClr val="028090"/>
+                      </a:solidFill>
+                      <a:prstDash val="solid"/>
+                      <a:round/>
+                      <a:headEnd type="none" w="med" len="med"/>
+                      <a:tailEnd type="none" w="med" len="med"/>
+                    </a:lnT>
+                    <a:lnB w="6350" cap="flat" cmpd="sng" algn="ctr">
+                      <a:solidFill>
+                        <a:srgbClr val="028090"/>
+                      </a:solidFill>
+                      <a:prstDash val="solid"/>
+                      <a:round/>
+                      <a:headEnd type="none" w="med" len="med"/>
+                      <a:tailEnd type="none" w="med" len="med"/>
+                    </a:lnB>
+                    <a:solidFill>
+                      <a:srgbClr val="16213E"/>
+                    </a:solidFill>
+                  </a:tcPr>
+                </a:tc>
+                <a:tc>
+                  <a:txBody>
+                    <a:bodyPr/>
+                    <a:lstStyle/>
+                    <a:p>
+                      <a:pPr indent="0" marL="0">
+                        <a:buNone/>
+                      </a:pPr>
+                      <a:r>
+                        <a:rPr lang="en-US" sz="1000" dirty="0">
+                          <a:solidFill>
+                            <a:srgbClr val="CCCCCC"/>
+                          </a:solidFill>
+                          <a:latin typeface="Calibri" pitchFamily="34" charset="0"/>
+                          <a:ea typeface="Calibri" pitchFamily="34" charset="-122"/>
+                          <a:cs typeface="Calibri" pitchFamily="34" charset="-120"/>
+                        </a:rPr>
+                        <a:t>Large scale,</a:t>
+                      </a:r>
+                      <a:endParaRPr lang="en-US" sz="1000" dirty="0">
+                        <a:latin typeface="Calibri" charset="0"/>
+                        <a:ea typeface="Calibri" charset="0"/>
+                        <a:cs typeface="Calibri" charset="0"/>
+                      </a:endParaRPr>
+                    </a:p>
+                    <a:p>
+                      <a:pPr indent="0" marL="0">
+                        <a:buNone/>
+                      </a:pPr>
+                      <a:r>
+                        <a:rPr lang="en-US" sz="1000" dirty="0">
+                          <a:solidFill>
+                            <a:srgbClr val="CCCCCC"/>
+                          </a:solidFill>
+                          <a:latin typeface="Calibri" pitchFamily="34" charset="0"/>
+                          <a:ea typeface="Calibri" pitchFamily="34" charset="-122"/>
+                          <a:cs typeface="Calibri" pitchFamily="34" charset="-120"/>
+                        </a:rPr>
+                        <a:t>one-off facilities</a:t>
+                      </a:r>
+                      <a:endParaRPr lang="en-US" sz="1000" dirty="0">
+                        <a:latin typeface="Calibri" charset="0"/>
+                        <a:ea typeface="Calibri" charset="0"/>
+                        <a:cs typeface="Calibri" charset="0"/>
+                      </a:endParaRPr>
+                    </a:p>
+                  </a:txBody>
+                  <a:tcPr marL="91440" marR="91440" marT="45720" marB="45720" anchor="ctr">
+                    <a:lnL w="6350" cap="flat" cmpd="sng" algn="ctr">
+                      <a:solidFill>
+                        <a:srgbClr val="028090"/>
+                      </a:solidFill>
+                      <a:prstDash val="solid"/>
+                      <a:round/>
+                      <a:headEnd type="none" w="med" len="med"/>
+                      <a:tailEnd type="none" w="med" len="med"/>
+                    </a:lnL>
+                    <a:lnR w="6350" cap="flat" cmpd="sng" algn="ctr">
+                      <a:solidFill>
+                        <a:srgbClr val="028090"/>
+                      </a:solidFill>
+                      <a:prstDash val="solid"/>
+                      <a:round/>
+                      <a:headEnd type="none" w="med" len="med"/>
+                      <a:tailEnd type="none" w="med" len="med"/>
+                    </a:lnR>
+                    <a:lnT w="6350" cap="flat" cmpd="sng" algn="ctr">
+                      <a:solidFill>
+                        <a:srgbClr val="028090"/>
+                      </a:solidFill>
+                      <a:prstDash val="solid"/>
+                      <a:round/>
+                      <a:headEnd type="none" w="med" len="med"/>
+                      <a:tailEnd type="none" w="med" len="med"/>
+                    </a:lnT>
+                    <a:lnB w="6350" cap="flat" cmpd="sng" algn="ctr">
+                      <a:solidFill>
+                        <a:srgbClr val="028090"/>
+                      </a:solidFill>
+                      <a:prstDash val="solid"/>
+                      <a:round/>
+                      <a:headEnd type="none" w="med" len="med"/>
+                      <a:tailEnd type="none" w="med" len="med"/>
+                    </a:lnB>
+                    <a:solidFill>
+                      <a:srgbClr val="16213E"/>
+                    </a:solidFill>
+                  </a:tcPr>
+                </a:tc>
+                <a:tc>
+                  <a:txBody>
+                    <a:bodyPr/>
+                    <a:lstStyle/>
+                    <a:p>
+                      <a:pPr indent="0" marL="0">
+                        <a:buNone/>
+                      </a:pPr>
+                      <a:r>
+                        <a:rPr lang="en-US" sz="1000" dirty="0">
+                          <a:solidFill>
+                            <a:srgbClr val="CCCCCC"/>
+                          </a:solidFill>
+                          <a:latin typeface="Calibri" pitchFamily="34" charset="0"/>
+                          <a:ea typeface="Calibri" pitchFamily="34" charset="-122"/>
+                          <a:cs typeface="Calibri" pitchFamily="34" charset="-120"/>
+                        </a:rPr>
+                        <a:t>Large scale,</a:t>
+                      </a:r>
+                      <a:endParaRPr lang="en-US" sz="1000" dirty="0">
+                        <a:latin typeface="Calibri" charset="0"/>
+                        <a:ea typeface="Calibri" charset="0"/>
+                        <a:cs typeface="Calibri" charset="0"/>
+                      </a:endParaRPr>
+                    </a:p>
+                    <a:p>
+                      <a:pPr indent="0" marL="0">
+                        <a:buNone/>
+                      </a:pPr>
+                      <a:r>
+                        <a:rPr lang="en-US" sz="1000" dirty="0">
+                          <a:solidFill>
+                            <a:srgbClr val="CCCCCC"/>
+                          </a:solidFill>
+                          <a:latin typeface="Calibri" pitchFamily="34" charset="0"/>
+                          <a:ea typeface="Calibri" pitchFamily="34" charset="-122"/>
+                          <a:cs typeface="Calibri" pitchFamily="34" charset="-120"/>
+                        </a:rPr>
+                        <a:t>one-off facilities</a:t>
+                      </a:r>
+                      <a:endParaRPr lang="en-US" sz="1000" dirty="0">
+                        <a:latin typeface="Calibri" charset="0"/>
+                        <a:ea typeface="Calibri" charset="0"/>
+                        <a:cs typeface="Calibri" charset="0"/>
+                      </a:endParaRPr>
+                    </a:p>
+                  </a:txBody>
+                  <a:tcPr marL="91440" marR="91440" marT="45720" marB="45720" anchor="ctr">
+                    <a:lnL w="6350" cap="flat" cmpd="sng" algn="ctr">
+                      <a:solidFill>
+                        <a:srgbClr val="028090"/>
+                      </a:solidFill>
+                      <a:prstDash val="solid"/>
+                      <a:round/>
+                      <a:headEnd type="none" w="med" len="med"/>
+                      <a:tailEnd type="none" w="med" len="med"/>
+                    </a:lnL>
+                    <a:lnR w="6350" cap="flat" cmpd="sng" algn="ctr">
+                      <a:solidFill>
+                        <a:srgbClr val="028090"/>
+                      </a:solidFill>
+                      <a:prstDash val="solid"/>
+                      <a:round/>
+                      <a:headEnd type="none" w="med" len="med"/>
+                      <a:tailEnd type="none" w="med" len="med"/>
+                    </a:lnR>
+                    <a:lnT w="6350" cap="flat" cmpd="sng" algn="ctr">
+                      <a:solidFill>
+                        <a:srgbClr val="028090"/>
+                      </a:solidFill>
+                      <a:prstDash val="solid"/>
+                      <a:round/>
+                      <a:headEnd type="none" w="med" len="med"/>
+                      <a:tailEnd type="none" w="med" len="med"/>
+                    </a:lnT>
+                    <a:lnB w="6350" cap="flat" cmpd="sng" algn="ctr">
+                      <a:solidFill>
+                        <a:srgbClr val="028090"/>
+                      </a:solidFill>
+                      <a:prstDash val="solid"/>
+                      <a:round/>
+                      <a:headEnd type="none" w="med" len="med"/>
+                      <a:tailEnd type="none" w="med" len="med"/>
+                    </a:lnB>
+                    <a:solidFill>
+                      <a:srgbClr val="16213E"/>
+                    </a:solidFill>
+                  </a:tcPr>
+                </a:tc>
+                <a:tc>
+                  <a:txBody>
+                    <a:bodyPr/>
+                    <a:lstStyle/>
+                    <a:p>
+                      <a:pPr indent="0" marL="0">
+                        <a:buNone/>
+                      </a:pPr>
+                      <a:r>
+                        <a:rPr lang="en-US" sz="1000" dirty="0">
+                          <a:solidFill>
+                            <a:srgbClr val="CCCCCC"/>
+                          </a:solidFill>
+                          <a:latin typeface="Calibri" pitchFamily="34" charset="0"/>
+                          <a:ea typeface="Calibri" pitchFamily="34" charset="-122"/>
+                          <a:cs typeface="Calibri" pitchFamily="34" charset="-120"/>
+                        </a:rPr>
+                        <a:t>Small-scale (5-10MW),</a:t>
+                      </a:r>
+                      <a:endParaRPr lang="en-US" sz="1000" dirty="0">
+                        <a:latin typeface="Calibri" charset="0"/>
+                        <a:ea typeface="Calibri" charset="0"/>
+                        <a:cs typeface="Calibri" charset="0"/>
+                      </a:endParaRPr>
+                    </a:p>
+                    <a:p>
+                      <a:pPr indent="0" marL="0">
+                        <a:buNone/>
+                      </a:pPr>
+                      <a:r>
+                        <a:rPr lang="en-US" sz="1000" dirty="0">
+                          <a:solidFill>
+                            <a:srgbClr val="CCCCCC"/>
+                          </a:solidFill>
+                          <a:latin typeface="Calibri" pitchFamily="34" charset="0"/>
+                          <a:ea typeface="Calibri" pitchFamily="34" charset="-122"/>
+                          <a:cs typeface="Calibri" pitchFamily="34" charset="-120"/>
+                        </a:rPr>
+                        <a:t>replicable facilities</a:t>
+                      </a:r>
+                      <a:endParaRPr lang="en-US" sz="1000" dirty="0">
+                        <a:latin typeface="Calibri" charset="0"/>
+                        <a:ea typeface="Calibri" charset="0"/>
+                        <a:cs typeface="Calibri" charset="0"/>
+                      </a:endParaRPr>
+                    </a:p>
+                  </a:txBody>
+                  <a:tcPr marL="91440" marR="91440" marT="45720" marB="45720" anchor="ctr">
+                    <a:lnL w="6350" cap="flat" cmpd="sng" algn="ctr">
+                      <a:solidFill>
+                        <a:srgbClr val="028090"/>
+                      </a:solidFill>
+                      <a:prstDash val="solid"/>
+                      <a:round/>
+                      <a:headEnd type="none" w="med" len="med"/>
+                      <a:tailEnd type="none" w="med" len="med"/>
+                    </a:lnL>
+                    <a:lnR w="6350" cap="flat" cmpd="sng" algn="ctr">
+                      <a:solidFill>
+                        <a:srgbClr val="028090"/>
+                      </a:solidFill>
+                      <a:prstDash val="solid"/>
+                      <a:round/>
+                      <a:headEnd type="none" w="med" len="med"/>
+                      <a:tailEnd type="none" w="med" len="med"/>
+                    </a:lnR>
+                    <a:lnT w="6350" cap="flat" cmpd="sng" algn="ctr">
+                      <a:solidFill>
+                        <a:srgbClr val="028090"/>
+                      </a:solidFill>
+                      <a:prstDash val="solid"/>
+                      <a:round/>
+                      <a:headEnd type="none" w="med" len="med"/>
+                      <a:tailEnd type="none" w="med" len="med"/>
+                    </a:lnT>
+                    <a:lnB w="6350" cap="flat" cmpd="sng" algn="ctr">
+                      <a:solidFill>
+                        <a:srgbClr val="028090"/>
+                      </a:solidFill>
+                      <a:prstDash val="solid"/>
+                      <a:round/>
+                      <a:headEnd type="none" w="med" len="med"/>
+                      <a:tailEnd type="none" w="med" len="med"/>
+                    </a:lnB>
+                    <a:solidFill>
+                      <a:srgbClr val="16213E"/>
+                    </a:solidFill>
+                  </a:tcPr>
+                </a:tc>
+              </a:tr>
+              <a:tr h="512064">
+                <a:tc>
+                  <a:txBody>
+                    <a:bodyPr/>
+                    <a:lstStyle/>
+                    <a:p>
+                      <a:pPr indent="0" marL="0">
+                        <a:buNone/>
+                      </a:pPr>
+                      <a:r>
+                        <a:rPr lang="en-US" sz="1100" b="1" dirty="0">
+                          <a:solidFill>
+                            <a:srgbClr val="00A896"/>
+                          </a:solidFill>
+                          <a:latin typeface="Calibri" pitchFamily="34" charset="0"/>
+                          <a:ea typeface="Calibri" pitchFamily="34" charset="-122"/>
+                          <a:cs typeface="Calibri" pitchFamily="34" charset="-120"/>
+                        </a:rPr>
+                        <a:t>CAPEX per</a:t>
+                      </a:r>
+                      <a:endParaRPr lang="en-US" sz="1100" dirty="0">
+                        <a:latin typeface="Calibri" charset="0"/>
+                        <a:ea typeface="Calibri" charset="0"/>
+                        <a:cs typeface="Calibri" charset="0"/>
+                      </a:endParaRPr>
+                    </a:p>
+                    <a:p>
+                      <a:pPr indent="0" marL="0">
+                        <a:buNone/>
+                      </a:pPr>
+                      <a:r>
+                        <a:rPr lang="en-US" sz="1100" b="1" dirty="0">
+                          <a:solidFill>
+                            <a:srgbClr val="00A896"/>
+                          </a:solidFill>
+                          <a:latin typeface="Calibri" pitchFamily="34" charset="0"/>
+                          <a:ea typeface="Calibri" pitchFamily="34" charset="-122"/>
+                          <a:cs typeface="Calibri" pitchFamily="34" charset="-120"/>
+                        </a:rPr>
+                        <a:t>facility</a:t>
+                      </a:r>
+                      <a:endParaRPr lang="en-US" sz="1100" dirty="0">
+                        <a:latin typeface="Calibri" charset="0"/>
+                        <a:ea typeface="Calibri" charset="0"/>
+                        <a:cs typeface="Calibri" charset="0"/>
+                      </a:endParaRPr>
+                    </a:p>
+                  </a:txBody>
+                  <a:tcPr marL="91440" marR="91440" marT="45720" marB="45720" anchor="ctr">
+                    <a:lnL w="6350" cap="flat" cmpd="sng" algn="ctr">
+                      <a:solidFill>
+                        <a:srgbClr val="028090"/>
+                      </a:solidFill>
+                      <a:prstDash val="solid"/>
+                      <a:round/>
+                      <a:headEnd type="none" w="med" len="med"/>
+                      <a:tailEnd type="none" w="med" len="med"/>
+                    </a:lnL>
+                    <a:lnR w="6350" cap="flat" cmpd="sng" algn="ctr">
+                      <a:solidFill>
+                        <a:srgbClr val="028090"/>
+                      </a:solidFill>
+                      <a:prstDash val="solid"/>
+                      <a:round/>
+                      <a:headEnd type="none" w="med" len="med"/>
+                      <a:tailEnd type="none" w="med" len="med"/>
+                    </a:lnR>
+                    <a:lnT w="6350" cap="flat" cmpd="sng" algn="ctr">
+                      <a:solidFill>
+                        <a:srgbClr val="028090"/>
+                      </a:solidFill>
+                      <a:prstDash val="solid"/>
+                      <a:round/>
+                      <a:headEnd type="none" w="med" len="med"/>
+                      <a:tailEnd type="none" w="med" len="med"/>
+                    </a:lnT>
+                    <a:lnB w="6350" cap="flat" cmpd="sng" algn="ctr">
+                      <a:solidFill>
+                        <a:srgbClr val="028090"/>
+                      </a:solidFill>
+                      <a:prstDash val="solid"/>
+                      <a:round/>
+                      <a:headEnd type="none" w="med" len="med"/>
+                      <a:tailEnd type="none" w="med" len="med"/>
+                    </a:lnB>
+                    <a:solidFill>
+                      <a:srgbClr val="16213E"/>
+                    </a:solidFill>
+                  </a:tcPr>
+                </a:tc>
+                <a:tc>
+                  <a:txBody>
+                    <a:bodyPr/>
+                    <a:lstStyle/>
+                    <a:p>
+                      <a:pPr indent="0" marL="0">
+                        <a:buNone/>
+                      </a:pPr>
+                      <a:r>
+                        <a:rPr lang="en-US" sz="1000" dirty="0">
+                          <a:solidFill>
+                            <a:srgbClr val="CCCCCC"/>
+                          </a:solidFill>
+                          <a:latin typeface="Calibri" pitchFamily="34" charset="0"/>
+                          <a:ea typeface="Calibri" pitchFamily="34" charset="-122"/>
+                          <a:cs typeface="Calibri" pitchFamily="34" charset="-120"/>
+                        </a:rPr>
+                        <a:t>Triple-digit mn</a:t>
+                      </a:r>
+                      <a:endParaRPr lang="en-US" sz="1000" dirty="0">
+                        <a:latin typeface="Calibri" charset="0"/>
+                        <a:ea typeface="Calibri" charset="0"/>
+                        <a:cs typeface="Calibri" charset="0"/>
+                      </a:endParaRPr>
+                    </a:p>
+                    <a:p>
+                      <a:pPr indent="0" marL="0">
+                        <a:buNone/>
+                      </a:pPr>
+                      <a:r>
+                        <a:rPr lang="en-US" sz="1000" dirty="0">
+                          <a:solidFill>
+                            <a:srgbClr val="CCCCCC"/>
+                          </a:solidFill>
+                          <a:latin typeface="Calibri" pitchFamily="34" charset="0"/>
+                          <a:ea typeface="Calibri" pitchFamily="34" charset="-122"/>
+                          <a:cs typeface="Calibri" pitchFamily="34" charset="-120"/>
+                        </a:rPr>
+                        <a:t>EUR CAPEX</a:t>
+                      </a:r>
+                      <a:endParaRPr lang="en-US" sz="1000" dirty="0">
+                        <a:latin typeface="Calibri" charset="0"/>
+                        <a:ea typeface="Calibri" charset="0"/>
+                        <a:cs typeface="Calibri" charset="0"/>
+                      </a:endParaRPr>
+                    </a:p>
+                  </a:txBody>
+                  <a:tcPr marL="91440" marR="91440" marT="45720" marB="45720" anchor="ctr">
+                    <a:lnL w="6350" cap="flat" cmpd="sng" algn="ctr">
+                      <a:solidFill>
+                        <a:srgbClr val="028090"/>
+                      </a:solidFill>
+                      <a:prstDash val="solid"/>
+                      <a:round/>
+                      <a:headEnd type="none" w="med" len="med"/>
+                      <a:tailEnd type="none" w="med" len="med"/>
+                    </a:lnL>
+                    <a:lnR w="6350" cap="flat" cmpd="sng" algn="ctr">
+                      <a:solidFill>
+                        <a:srgbClr val="028090"/>
+                      </a:solidFill>
+                      <a:prstDash val="solid"/>
+                      <a:round/>
+                      <a:headEnd type="none" w="med" len="med"/>
+                      <a:tailEnd type="none" w="med" len="med"/>
+                    </a:lnR>
+                    <a:lnT w="6350" cap="flat" cmpd="sng" algn="ctr">
+                      <a:solidFill>
+                        <a:srgbClr val="028090"/>
+                      </a:solidFill>
+                      <a:prstDash val="solid"/>
+                      <a:round/>
+                      <a:headEnd type="none" w="med" len="med"/>
+                      <a:tailEnd type="none" w="med" len="med"/>
+                    </a:lnT>
+                    <a:lnB w="6350" cap="flat" cmpd="sng" algn="ctr">
+                      <a:solidFill>
+                        <a:srgbClr val="028090"/>
+                      </a:solidFill>
+                      <a:prstDash val="solid"/>
+                      <a:round/>
+                      <a:headEnd type="none" w="med" len="med"/>
+                      <a:tailEnd type="none" w="med" len="med"/>
+                    </a:lnB>
+                    <a:solidFill>
+                      <a:srgbClr val="1A1A3E"/>
+                    </a:solidFill>
+                  </a:tcPr>
+                </a:tc>
+                <a:tc>
+                  <a:txBody>
+                    <a:bodyPr/>
+                    <a:lstStyle/>
+                    <a:p>
+                      <a:pPr indent="0" marL="0">
+                        <a:buNone/>
+                      </a:pPr>
+                      <a:r>
+                        <a:rPr lang="en-US" sz="1000" dirty="0">
+                          <a:solidFill>
+                            <a:srgbClr val="CCCCCC"/>
+                          </a:solidFill>
+                          <a:latin typeface="Calibri" pitchFamily="34" charset="0"/>
+                          <a:ea typeface="Calibri" pitchFamily="34" charset="-122"/>
+                          <a:cs typeface="Calibri" pitchFamily="34" charset="-120"/>
+                        </a:rPr>
+                        <a:t>Triple-digit mn</a:t>
+                      </a:r>
+                      <a:endParaRPr lang="en-US" sz="1000" dirty="0">
+                        <a:latin typeface="Calibri" charset="0"/>
+                        <a:ea typeface="Calibri" charset="0"/>
+                        <a:cs typeface="Calibri" charset="0"/>
+                      </a:endParaRPr>
+                    </a:p>
+                    <a:p>
+                      <a:pPr indent="0" marL="0">
+                        <a:buNone/>
+                      </a:pPr>
+                      <a:r>
+                        <a:rPr lang="en-US" sz="1000" dirty="0">
+                          <a:solidFill>
+                            <a:srgbClr val="CCCCCC"/>
+                          </a:solidFill>
+                          <a:latin typeface="Calibri" pitchFamily="34" charset="0"/>
+                          <a:ea typeface="Calibri" pitchFamily="34" charset="-122"/>
+                          <a:cs typeface="Calibri" pitchFamily="34" charset="-120"/>
+                        </a:rPr>
+                        <a:t>EUR CAPEX</a:t>
+                      </a:r>
+                      <a:endParaRPr lang="en-US" sz="1000" dirty="0">
+                        <a:latin typeface="Calibri" charset="0"/>
+                        <a:ea typeface="Calibri" charset="0"/>
+                        <a:cs typeface="Calibri" charset="0"/>
+                      </a:endParaRPr>
+                    </a:p>
+                  </a:txBody>
+                  <a:tcPr marL="91440" marR="91440" marT="45720" marB="45720" anchor="ctr">
+                    <a:lnL w="6350" cap="flat" cmpd="sng" algn="ctr">
+                      <a:solidFill>
+                        <a:srgbClr val="028090"/>
+                      </a:solidFill>
+                      <a:prstDash val="solid"/>
+                      <a:round/>
+                      <a:headEnd type="none" w="med" len="med"/>
+                      <a:tailEnd type="none" w="med" len="med"/>
+                    </a:lnL>
+                    <a:lnR w="6350" cap="flat" cmpd="sng" algn="ctr">
+                      <a:solidFill>
+                        <a:srgbClr val="028090"/>
+                      </a:solidFill>
+                      <a:prstDash val="solid"/>
+                      <a:round/>
+                      <a:headEnd type="none" w="med" len="med"/>
+                      <a:tailEnd type="none" w="med" len="med"/>
+                    </a:lnR>
+                    <a:lnT w="6350" cap="flat" cmpd="sng" algn="ctr">
+                      <a:solidFill>
+                        <a:srgbClr val="028090"/>
+                      </a:solidFill>
+                      <a:prstDash val="solid"/>
+                      <a:round/>
+                      <a:headEnd type="none" w="med" len="med"/>
+                      <a:tailEnd type="none" w="med" len="med"/>
+                    </a:lnT>
+                    <a:lnB w="6350" cap="flat" cmpd="sng" algn="ctr">
+                      <a:solidFill>
+                        <a:srgbClr val="028090"/>
+                      </a:solidFill>
+                      <a:prstDash val="solid"/>
+                      <a:round/>
+                      <a:headEnd type="none" w="med" len="med"/>
+                      <a:tailEnd type="none" w="med" len="med"/>
+                    </a:lnB>
+                    <a:solidFill>
+                      <a:srgbClr val="1A1A3E"/>
+                    </a:solidFill>
+                  </a:tcPr>
+                </a:tc>
+                <a:tc>
+                  <a:txBody>
+                    <a:bodyPr/>
+                    <a:lstStyle/>
+                    <a:p>
+                      <a:pPr indent="0" marL="0">
+                        <a:buNone/>
+                      </a:pPr>
+                      <a:r>
+                        <a:rPr lang="en-US" sz="1000" dirty="0">
+                          <a:solidFill>
+                            <a:srgbClr val="CCCCCC"/>
+                          </a:solidFill>
+                          <a:latin typeface="Calibri" pitchFamily="34" charset="0"/>
+                          <a:ea typeface="Calibri" pitchFamily="34" charset="-122"/>
+                          <a:cs typeface="Calibri" pitchFamily="34" charset="-120"/>
+                        </a:rPr>
+                        <a:t>Single/double-digit mn</a:t>
+                      </a:r>
+                      <a:endParaRPr lang="en-US" sz="1000" dirty="0">
+                        <a:latin typeface="Calibri" charset="0"/>
+                        <a:ea typeface="Calibri" charset="0"/>
+                        <a:cs typeface="Calibri" charset="0"/>
+                      </a:endParaRPr>
+                    </a:p>
+                    <a:p>
+                      <a:pPr indent="0" marL="0">
+                        <a:buNone/>
+                      </a:pPr>
+                      <a:r>
+                        <a:rPr lang="en-US" sz="1000" dirty="0">
+                          <a:solidFill>
+                            <a:srgbClr val="CCCCCC"/>
+                          </a:solidFill>
+                          <a:latin typeface="Calibri" pitchFamily="34" charset="0"/>
+                          <a:ea typeface="Calibri" pitchFamily="34" charset="-122"/>
+                          <a:cs typeface="Calibri" pitchFamily="34" charset="-120"/>
+                        </a:rPr>
+                        <a:t>EUR CAPEX</a:t>
+                      </a:r>
+                      <a:endParaRPr lang="en-US" sz="1000" dirty="0">
+                        <a:latin typeface="Calibri" charset="0"/>
+                        <a:ea typeface="Calibri" charset="0"/>
+                        <a:cs typeface="Calibri" charset="0"/>
+                      </a:endParaRPr>
+                    </a:p>
+                  </a:txBody>
+                  <a:tcPr marL="91440" marR="91440" marT="45720" marB="45720" anchor="ctr">
+                    <a:lnL w="6350" cap="flat" cmpd="sng" algn="ctr">
+                      <a:solidFill>
+                        <a:srgbClr val="028090"/>
+                      </a:solidFill>
+                      <a:prstDash val="solid"/>
+                      <a:round/>
+                      <a:headEnd type="none" w="med" len="med"/>
+                      <a:tailEnd type="none" w="med" len="med"/>
+                    </a:lnL>
+                    <a:lnR w="6350" cap="flat" cmpd="sng" algn="ctr">
+                      <a:solidFill>
+                        <a:srgbClr val="028090"/>
+                      </a:solidFill>
+                      <a:prstDash val="solid"/>
+                      <a:round/>
+                      <a:headEnd type="none" w="med" len="med"/>
+                      <a:tailEnd type="none" w="med" len="med"/>
+                    </a:lnR>
+                    <a:lnT w="6350" cap="flat" cmpd="sng" algn="ctr">
+                      <a:solidFill>
+                        <a:srgbClr val="028090"/>
+                      </a:solidFill>
+                      <a:prstDash val="solid"/>
+                      <a:round/>
+                      <a:headEnd type="none" w="med" len="med"/>
+                      <a:tailEnd type="none" w="med" len="med"/>
+                    </a:lnT>
+                    <a:lnB w="6350" cap="flat" cmpd="sng" algn="ctr">
+                      <a:solidFill>
+                        <a:srgbClr val="028090"/>
+                      </a:solidFill>
+                      <a:prstDash val="solid"/>
+                      <a:round/>
+                      <a:headEnd type="none" w="med" len="med"/>
+                      <a:tailEnd type="none" w="med" len="med"/>
+                    </a:lnB>
+                    <a:solidFill>
+                      <a:srgbClr val="1A1A3E"/>
+                    </a:solidFill>
+                  </a:tcPr>
+                </a:tc>
+              </a:tr>
+              <a:tr h="512064">
+                <a:tc>
+                  <a:txBody>
+                    <a:bodyPr/>
+                    <a:lstStyle/>
+                    <a:p>
+                      <a:pPr indent="0" marL="0">
+                        <a:buNone/>
+                      </a:pPr>
+                      <a:r>
+                        <a:rPr lang="en-US" sz="1100" b="1" dirty="0">
+                          <a:solidFill>
+                            <a:srgbClr val="00A896"/>
+                          </a:solidFill>
+                          <a:latin typeface="Calibri" pitchFamily="34" charset="0"/>
+                          <a:ea typeface="Calibri" pitchFamily="34" charset="-122"/>
+                          <a:cs typeface="Calibri" pitchFamily="34" charset="-120"/>
+                        </a:rPr>
+                        <a:t>EPC</a:t>
+                      </a:r>
+                      <a:endParaRPr lang="en-US" sz="1100" dirty="0">
+                        <a:latin typeface="Calibri" charset="0"/>
+                        <a:ea typeface="Calibri" charset="0"/>
+                        <a:cs typeface="Calibri" charset="0"/>
+                      </a:endParaRPr>
+                    </a:p>
+                    <a:p>
+                      <a:pPr indent="0" marL="0">
+                        <a:buNone/>
+                      </a:pPr>
+                      <a:r>
+                        <a:rPr lang="en-US" sz="1100" b="1" dirty="0">
+                          <a:solidFill>
+                            <a:srgbClr val="00A896"/>
+                          </a:solidFill>
+                          <a:latin typeface="Calibri" pitchFamily="34" charset="0"/>
+                          <a:ea typeface="Calibri" pitchFamily="34" charset="-122"/>
+                          <a:cs typeface="Calibri" pitchFamily="34" charset="-120"/>
+                        </a:rPr>
+                        <a:t>duration</a:t>
+                      </a:r>
+                      <a:endParaRPr lang="en-US" sz="1100" dirty="0">
+                        <a:latin typeface="Calibri" charset="0"/>
+                        <a:ea typeface="Calibri" charset="0"/>
+                        <a:cs typeface="Calibri" charset="0"/>
+                      </a:endParaRPr>
+                    </a:p>
+                  </a:txBody>
+                  <a:tcPr marL="91440" marR="91440" marT="45720" marB="45720" anchor="ctr">
+                    <a:lnL w="6350" cap="flat" cmpd="sng" algn="ctr">
+                      <a:solidFill>
+                        <a:srgbClr val="028090"/>
+                      </a:solidFill>
+                      <a:prstDash val="solid"/>
+                      <a:round/>
+                      <a:headEnd type="none" w="med" len="med"/>
+                      <a:tailEnd type="none" w="med" len="med"/>
+                    </a:lnL>
+                    <a:lnR w="6350" cap="flat" cmpd="sng" algn="ctr">
+                      <a:solidFill>
+                        <a:srgbClr val="028090"/>
+                      </a:solidFill>
+                      <a:prstDash val="solid"/>
+                      <a:round/>
+                      <a:headEnd type="none" w="med" len="med"/>
+                      <a:tailEnd type="none" w="med" len="med"/>
+                    </a:lnR>
+                    <a:lnT w="6350" cap="flat" cmpd="sng" algn="ctr">
+                      <a:solidFill>
+                        <a:srgbClr val="028090"/>
+                      </a:solidFill>
+                      <a:prstDash val="solid"/>
+                      <a:round/>
+                      <a:headEnd type="none" w="med" len="med"/>
+                      <a:tailEnd type="none" w="med" len="med"/>
+                    </a:lnT>
+                    <a:lnB w="6350" cap="flat" cmpd="sng" algn="ctr">
+                      <a:solidFill>
+                        <a:srgbClr val="028090"/>
+                      </a:solidFill>
+                      <a:prstDash val="solid"/>
+                      <a:round/>
+                      <a:headEnd type="none" w="med" len="med"/>
+                      <a:tailEnd type="none" w="med" len="med"/>
+                    </a:lnB>
+                    <a:solidFill>
+                      <a:srgbClr val="16213E"/>
+                    </a:solidFill>
+                  </a:tcPr>
+                </a:tc>
+                <a:tc>
+                  <a:txBody>
+                    <a:bodyPr/>
+                    <a:lstStyle/>
+                    <a:p>
+                      <a:pPr indent="0" marL="0">
+                        <a:buNone/>
+                      </a:pPr>
+                      <a:r>
+                        <a:rPr lang="en-US" sz="1000" dirty="0">
+                          <a:solidFill>
+                            <a:srgbClr val="CCCCCC"/>
+                          </a:solidFill>
+                          <a:latin typeface="Calibri" pitchFamily="34" charset="0"/>
+                          <a:ea typeface="Calibri" pitchFamily="34" charset="-122"/>
+                          <a:cs typeface="Calibri" pitchFamily="34" charset="-120"/>
+                        </a:rPr>
+                        <a:t>3-5 years</a:t>
+                      </a:r>
+                      <a:endParaRPr lang="en-US" sz="1000" dirty="0">
+                        <a:latin typeface="Calibri" charset="0"/>
+                        <a:ea typeface="Calibri" charset="0"/>
+                        <a:cs typeface="Calibri" charset="0"/>
+                      </a:endParaRPr>
+                    </a:p>
+                  </a:txBody>
+                  <a:tcPr marL="91440" marR="91440" marT="45720" marB="45720" anchor="ctr">
+                    <a:lnL w="6350" cap="flat" cmpd="sng" algn="ctr">
+                      <a:solidFill>
+                        <a:srgbClr val="028090"/>
+                      </a:solidFill>
+                      <a:prstDash val="solid"/>
+                      <a:round/>
+                      <a:headEnd type="none" w="med" len="med"/>
+                      <a:tailEnd type="none" w="med" len="med"/>
+                    </a:lnL>
+                    <a:lnR w="6350" cap="flat" cmpd="sng" algn="ctr">
+                      <a:solidFill>
+                        <a:srgbClr val="028090"/>
+                      </a:solidFill>
+                      <a:prstDash val="solid"/>
+                      <a:round/>
+                      <a:headEnd type="none" w="med" len="med"/>
+                      <a:tailEnd type="none" w="med" len="med"/>
+                    </a:lnR>
+                    <a:lnT w="6350" cap="flat" cmpd="sng" algn="ctr">
+                      <a:solidFill>
+                        <a:srgbClr val="028090"/>
+                      </a:solidFill>
+                      <a:prstDash val="solid"/>
+                      <a:round/>
+                      <a:headEnd type="none" w="med" len="med"/>
+                      <a:tailEnd type="none" w="med" len="med"/>
+                    </a:lnT>
+                    <a:lnB w="6350" cap="flat" cmpd="sng" algn="ctr">
+                      <a:solidFill>
+                        <a:srgbClr val="028090"/>
+                      </a:solidFill>
+                      <a:prstDash val="solid"/>
+                      <a:round/>
+                      <a:headEnd type="none" w="med" len="med"/>
+                      <a:tailEnd type="none" w="med" len="med"/>
+                    </a:lnB>
+                    <a:solidFill>
+                      <a:srgbClr val="16213E"/>
+                    </a:solidFill>
+                  </a:tcPr>
+                </a:tc>
+                <a:tc>
+                  <a:txBody>
+                    <a:bodyPr/>
+                    <a:lstStyle/>
+                    <a:p>
+                      <a:pPr indent="0" marL="0">
+                        <a:buNone/>
+                      </a:pPr>
+                      <a:r>
+                        <a:rPr lang="en-US" sz="1000" dirty="0">
+                          <a:solidFill>
+                            <a:srgbClr val="CCCCCC"/>
+                          </a:solidFill>
+                          <a:latin typeface="Calibri" pitchFamily="34" charset="0"/>
+                          <a:ea typeface="Calibri" pitchFamily="34" charset="-122"/>
+                          <a:cs typeface="Calibri" pitchFamily="34" charset="-120"/>
+                        </a:rPr>
+                        <a:t>5-10+ years</a:t>
+                      </a:r>
+                      <a:endParaRPr lang="en-US" sz="1000" dirty="0">
+                        <a:latin typeface="Calibri" charset="0"/>
+                        <a:ea typeface="Calibri" charset="0"/>
+                        <a:cs typeface="Calibri" charset="0"/>
+                      </a:endParaRPr>
+                    </a:p>
+                    <a:p>
+                      <a:pPr indent="0" marL="0">
+                        <a:buNone/>
+                      </a:pPr>
+                      <a:r>
+                        <a:rPr lang="en-US" sz="1000" dirty="0">
+                          <a:solidFill>
+                            <a:srgbClr val="CCCCCC"/>
+                          </a:solidFill>
+                          <a:latin typeface="Calibri" pitchFamily="34" charset="0"/>
+                          <a:ea typeface="Calibri" pitchFamily="34" charset="-122"/>
+                          <a:cs typeface="Calibri" pitchFamily="34" charset="-120"/>
+                        </a:rPr>
+                        <a:t>(CO2 storage dev.)</a:t>
+                      </a:r>
+                      <a:endParaRPr lang="en-US" sz="1000" dirty="0">
+                        <a:latin typeface="Calibri" charset="0"/>
+                        <a:ea typeface="Calibri" charset="0"/>
+                        <a:cs typeface="Calibri" charset="0"/>
+                      </a:endParaRPr>
+                    </a:p>
+                  </a:txBody>
+                  <a:tcPr marL="91440" marR="91440" marT="45720" marB="45720" anchor="ctr">
+                    <a:lnL w="6350" cap="flat" cmpd="sng" algn="ctr">
+                      <a:solidFill>
+                        <a:srgbClr val="028090"/>
+                      </a:solidFill>
+                      <a:prstDash val="solid"/>
+                      <a:round/>
+                      <a:headEnd type="none" w="med" len="med"/>
+                      <a:tailEnd type="none" w="med" len="med"/>
+                    </a:lnL>
+                    <a:lnR w="6350" cap="flat" cmpd="sng" algn="ctr">
+                      <a:solidFill>
+                        <a:srgbClr val="028090"/>
+                      </a:solidFill>
+                      <a:prstDash val="solid"/>
+                      <a:round/>
+                      <a:headEnd type="none" w="med" len="med"/>
+                      <a:tailEnd type="none" w="med" len="med"/>
+                    </a:lnR>
+                    <a:lnT w="6350" cap="flat" cmpd="sng" algn="ctr">
+                      <a:solidFill>
+                        <a:srgbClr val="028090"/>
+                      </a:solidFill>
+                      <a:prstDash val="solid"/>
+                      <a:round/>
+                      <a:headEnd type="none" w="med" len="med"/>
+                      <a:tailEnd type="none" w="med" len="med"/>
+                    </a:lnT>
+                    <a:lnB w="6350" cap="flat" cmpd="sng" algn="ctr">
+                      <a:solidFill>
+                        <a:srgbClr val="028090"/>
+                      </a:solidFill>
+                      <a:prstDash val="solid"/>
+                      <a:round/>
+                      <a:headEnd type="none" w="med" len="med"/>
+                      <a:tailEnd type="none" w="med" len="med"/>
+                    </a:lnB>
+                    <a:solidFill>
+                      <a:srgbClr val="16213E"/>
+                    </a:solidFill>
+                  </a:tcPr>
+                </a:tc>
+                <a:tc>
+                  <a:txBody>
+                    <a:bodyPr/>
+                    <a:lstStyle/>
+                    <a:p>
+                      <a:pPr indent="0" marL="0">
+                        <a:buNone/>
+                      </a:pPr>
+                      <a:r>
+                        <a:rPr lang="en-US" sz="1000" dirty="0">
+                          <a:solidFill>
+                            <a:srgbClr val="CCCCCC"/>
+                          </a:solidFill>
+                          <a:latin typeface="Calibri" pitchFamily="34" charset="0"/>
+                          <a:ea typeface="Calibri" pitchFamily="34" charset="-122"/>
+                          <a:cs typeface="Calibri" pitchFamily="34" charset="-120"/>
+                        </a:rPr>
+                        <a:t>1-3 years</a:t>
+                      </a:r>
+                      <a:endParaRPr lang="en-US" sz="1000" dirty="0">
+                        <a:latin typeface="Calibri" charset="0"/>
+                        <a:ea typeface="Calibri" charset="0"/>
+                        <a:cs typeface="Calibri" charset="0"/>
+                      </a:endParaRPr>
+                    </a:p>
+                  </a:txBody>
+                  <a:tcPr marL="91440" marR="91440" marT="45720" marB="45720" anchor="ctr">
+                    <a:lnL w="6350" cap="flat" cmpd="sng" algn="ctr">
+                      <a:solidFill>
+                        <a:srgbClr val="028090"/>
+                      </a:solidFill>
+                      <a:prstDash val="solid"/>
+                      <a:round/>
+                      <a:headEnd type="none" w="med" len="med"/>
+                      <a:tailEnd type="none" w="med" len="med"/>
+                    </a:lnL>
+                    <a:lnR w="6350" cap="flat" cmpd="sng" algn="ctr">
+                      <a:solidFill>
+                        <a:srgbClr val="028090"/>
+                      </a:solidFill>
+                      <a:prstDash val="solid"/>
+                      <a:round/>
+                      <a:headEnd type="none" w="med" len="med"/>
+                      <a:tailEnd type="none" w="med" len="med"/>
+                    </a:lnR>
+                    <a:lnT w="6350" cap="flat" cmpd="sng" algn="ctr">
+                      <a:solidFill>
+                        <a:srgbClr val="028090"/>
+                      </a:solidFill>
+                      <a:prstDash val="solid"/>
+                      <a:round/>
+                      <a:headEnd type="none" w="med" len="med"/>
+                      <a:tailEnd type="none" w="med" len="med"/>
+                    </a:lnT>
+                    <a:lnB w="6350" cap="flat" cmpd="sng" algn="ctr">
+                      <a:solidFill>
+                        <a:srgbClr val="028090"/>
+                      </a:solidFill>
+                      <a:prstDash val="solid"/>
+                      <a:round/>
+                      <a:headEnd type="none" w="med" len="med"/>
+                      <a:tailEnd type="none" w="med" len="med"/>
+                    </a:lnB>
+                    <a:solidFill>
+                      <a:srgbClr val="16213E"/>
+                    </a:solidFill>
+                  </a:tcPr>
+                </a:tc>
+              </a:tr>
+            </a:tbl>
+          </a:graphicData>
+        </a:graphic>
+      </p:graphicFrame>
       <p:sp>
         <p:nvSpPr>
-          <p:cNvPr id="4" name="Shape 2"/>
+          <p:cNvPr id="5" name="Text 2"/>
           <p:cNvSpPr/>
           <p:nvPr/>
         </p:nvSpPr>
         <p:spPr>
           <a:xfrm>
-            <a:off x="731520" y="2560320"/>
-            <a:ext cx="7680960" cy="0"/>
-          </a:xfrm>
-          <a:prstGeom prst="line">
-            <a:avLst/>
-          </a:prstGeom>
-          <a:noFill/>
-          <a:ln w="31750">
-            <a:solidFill>
-              <a:srgbClr val="028090"/>
-            </a:solidFill>
-            <a:prstDash val="solid"/>
-          </a:ln>
-        </p:spPr>
-      </p:sp>
-      <p:sp>
-        <p:nvSpPr>
-          <p:cNvPr id="5" name="Shape 3"/>
-          <p:cNvSpPr/>
-          <p:nvPr/>
-        </p:nvSpPr>
-        <p:spPr>
-          <a:xfrm>
-            <a:off x="585216" y="2414016"/>
-            <a:ext cx="292608" cy="292608"/>
-          </a:xfrm>
-          <a:prstGeom prst="ellipse">
-            <a:avLst/>
-          </a:prstGeom>
-          <a:solidFill>
-            <a:srgbClr val="028090"/>
-          </a:solidFill>
-          <a:ln w="19050">
-            <a:solidFill>
-              <a:srgbClr val="02C39A"/>
-            </a:solidFill>
-            <a:prstDash val="solid"/>
-          </a:ln>
-        </p:spPr>
-      </p:sp>
-      <p:sp>
-        <p:nvSpPr>
-          <p:cNvPr id="6" name="Text 4"/>
-          <p:cNvSpPr/>
-          <p:nvPr/>
-        </p:nvSpPr>
-        <p:spPr>
-          <a:xfrm>
-            <a:off x="274320" y="1874520"/>
-            <a:ext cx="914400" cy="320040"/>
+            <a:off x="457200" y="4617720"/>
+            <a:ext cx="6400800" cy="274320"/>
           </a:xfrm>
           <a:prstGeom prst="rect">
             <a:avLst/>
@@ -1019,37 +2993,37 @@
           <a:ln/>
         </p:spPr>
         <p:txBody>
-          <a:bodyPr wrap="square" lIns="0" tIns="0" rIns="0" bIns="0" rtlCol="0" anchor="ctr"/>
+          <a:bodyPr wrap="square" rtlCol="0" anchor="ctr"/>
           <a:lstStyle/>
           <a:p>
-            <a:pPr algn="ctr" indent="0" marL="0">
+            <a:pPr indent="0" marL="0">
               <a:buNone/>
             </a:pPr>
             <a:r>
-              <a:rPr lang="en-US" sz="1600" b="1" dirty="0">
+              <a:rPr lang="en-US" sz="800" dirty="0">
                 <a:solidFill>
-                  <a:srgbClr val="02C39A"/>
+                  <a:srgbClr val="777777"/>
                 </a:solidFill>
-                <a:latin typeface="Georgia" pitchFamily="34" charset="0"/>
-                <a:ea typeface="Georgia" pitchFamily="34" charset="-122"/>
-                <a:cs typeface="Georgia" pitchFamily="34" charset="-120"/>
+                <a:latin typeface="Calibri" pitchFamily="34" charset="0"/>
+                <a:ea typeface="Calibri" pitchFamily="34" charset="-122"/>
+                <a:cs typeface="Calibri" pitchFamily="34" charset="-120"/>
               </a:rPr>
-              <a:t>2020</a:t>
+              <a:t>Source: McKinsey Hydrogen Council analysis, 2020</a:t>
             </a:r>
-            <a:endParaRPr lang="en-US" sz="1600" dirty="0"/>
+            <a:endParaRPr lang="en-US" sz="800" dirty="0"/>
           </a:p>
         </p:txBody>
       </p:sp>
       <p:sp>
         <p:nvSpPr>
-          <p:cNvPr id="7" name="Text 5"/>
+          <p:cNvPr id="6" name="Text 3"/>
           <p:cNvSpPr/>
           <p:nvPr/>
         </p:nvSpPr>
         <p:spPr>
           <a:xfrm>
-            <a:off x="91440" y="2834640"/>
-            <a:ext cx="1280160" cy="685800"/>
+            <a:off x="6858000" y="4754880"/>
+            <a:ext cx="1828800" cy="274320"/>
           </a:xfrm>
           <a:prstGeom prst="rect">
             <a:avLst/>
@@ -1058,700 +3032,24 @@
           <a:ln/>
         </p:spPr>
         <p:txBody>
-          <a:bodyPr wrap="square" lIns="0" tIns="0" rIns="0" bIns="0" rtlCol="0" anchor="t"/>
+          <a:bodyPr wrap="square" rtlCol="0" anchor="ctr"/>
           <a:lstStyle/>
           <a:p>
-            <a:pPr algn="ctr" indent="0" marL="0">
+            <a:pPr algn="r" indent="0" marL="0">
               <a:buNone/>
             </a:pPr>
             <a:r>
-              <a:rPr lang="en-US" sz="1100" dirty="0">
+              <a:rPr lang="en-US" sz="800" dirty="0">
                 <a:solidFill>
-                  <a:srgbClr val="CCCCCC"/>
+                  <a:srgbClr val="777777"/>
                 </a:solidFill>
                 <a:latin typeface="Calibri" pitchFamily="34" charset="0"/>
                 <a:ea typeface="Calibri" pitchFamily="34" charset="-122"/>
                 <a:cs typeface="Calibri" pitchFamily="34" charset="-120"/>
               </a:rPr>
-              <a:t>National Hydrogen</a:t>
+              <a:t>McKinsey &amp; Company</a:t>
             </a:r>
-            <a:endParaRPr lang="en-US" sz="1100" dirty="0"/>
-          </a:p>
-          <a:p>
-            <a:pPr algn="ctr" indent="0" marL="0">
-              <a:buNone/>
-            </a:pPr>
-            <a:r>
-              <a:rPr lang="en-US" sz="1100" dirty="0">
-                <a:solidFill>
-                  <a:srgbClr val="CCCCCC"/>
-                </a:solidFill>
-                <a:latin typeface="Calibri" pitchFamily="34" charset="0"/>
-                <a:ea typeface="Calibri" pitchFamily="34" charset="-122"/>
-                <a:cs typeface="Calibri" pitchFamily="34" charset="-120"/>
-              </a:rPr>
-              <a:t>Strategy published</a:t>
-            </a:r>
-            <a:endParaRPr lang="en-US" sz="1100" dirty="0"/>
-          </a:p>
-        </p:txBody>
-      </p:sp>
-      <p:sp>
-        <p:nvSpPr>
-          <p:cNvPr id="8" name="Shape 6"/>
-          <p:cNvSpPr/>
-          <p:nvPr/>
-        </p:nvSpPr>
-        <p:spPr>
-          <a:xfrm>
-            <a:off x="2121408" y="2414016"/>
-            <a:ext cx="292608" cy="292608"/>
-          </a:xfrm>
-          <a:prstGeom prst="ellipse">
-            <a:avLst/>
-          </a:prstGeom>
-          <a:solidFill>
-            <a:srgbClr val="028090"/>
-          </a:solidFill>
-          <a:ln w="19050">
-            <a:solidFill>
-              <a:srgbClr val="02C39A"/>
-            </a:solidFill>
-            <a:prstDash val="solid"/>
-          </a:ln>
-        </p:spPr>
-      </p:sp>
-      <p:sp>
-        <p:nvSpPr>
-          <p:cNvPr id="9" name="Text 7"/>
-          <p:cNvSpPr/>
-          <p:nvPr/>
-        </p:nvSpPr>
-        <p:spPr>
-          <a:xfrm>
-            <a:off x="1810512" y="1874520"/>
-            <a:ext cx="914400" cy="320040"/>
-          </a:xfrm>
-          <a:prstGeom prst="rect">
-            <a:avLst/>
-          </a:prstGeom>
-          <a:noFill/>
-          <a:ln/>
-        </p:spPr>
-        <p:txBody>
-          <a:bodyPr wrap="square" lIns="0" tIns="0" rIns="0" bIns="0" rtlCol="0" anchor="ctr"/>
-          <a:lstStyle/>
-          <a:p>
-            <a:pPr algn="ctr" indent="0" marL="0">
-              <a:buNone/>
-            </a:pPr>
-            <a:r>
-              <a:rPr lang="en-US" sz="1600" b="1" dirty="0">
-                <a:solidFill>
-                  <a:srgbClr val="02C39A"/>
-                </a:solidFill>
-                <a:latin typeface="Georgia" pitchFamily="34" charset="0"/>
-                <a:ea typeface="Georgia" pitchFamily="34" charset="-122"/>
-                <a:cs typeface="Georgia" pitchFamily="34" charset="-120"/>
-              </a:rPr>
-              <a:t>2022</a:t>
-            </a:r>
-            <a:endParaRPr lang="en-US" sz="1600" dirty="0"/>
-          </a:p>
-        </p:txBody>
-      </p:sp>
-      <p:sp>
-        <p:nvSpPr>
-          <p:cNvPr id="10" name="Text 8"/>
-          <p:cNvSpPr/>
-          <p:nvPr/>
-        </p:nvSpPr>
-        <p:spPr>
-          <a:xfrm>
-            <a:off x="1627632" y="2834640"/>
-            <a:ext cx="1280160" cy="685800"/>
-          </a:xfrm>
-          <a:prstGeom prst="rect">
-            <a:avLst/>
-          </a:prstGeom>
-          <a:noFill/>
-          <a:ln/>
-        </p:spPr>
-        <p:txBody>
-          <a:bodyPr wrap="square" lIns="0" tIns="0" rIns="0" bIns="0" rtlCol="0" anchor="t"/>
-          <a:lstStyle/>
-          <a:p>
-            <a:pPr algn="ctr" indent="0" marL="0">
-              <a:buNone/>
-            </a:pPr>
-            <a:r>
-              <a:rPr lang="en-US" sz="1100" dirty="0">
-                <a:solidFill>
-                  <a:srgbClr val="CCCCCC"/>
-                </a:solidFill>
-                <a:latin typeface="Calibri" pitchFamily="34" charset="0"/>
-                <a:ea typeface="Calibri" pitchFamily="34" charset="-122"/>
-                <a:cs typeface="Calibri" pitchFamily="34" charset="-120"/>
-              </a:rPr>
-              <a:t>REPowerEU plan</a:t>
-            </a:r>
-            <a:endParaRPr lang="en-US" sz="1100" dirty="0"/>
-          </a:p>
-          <a:p>
-            <a:pPr algn="ctr" indent="0" marL="0">
-              <a:buNone/>
-            </a:pPr>
-            <a:r>
-              <a:rPr lang="en-US" sz="1100" dirty="0">
-                <a:solidFill>
-                  <a:srgbClr val="CCCCCC"/>
-                </a:solidFill>
-                <a:latin typeface="Calibri" pitchFamily="34" charset="0"/>
-                <a:ea typeface="Calibri" pitchFamily="34" charset="-122"/>
-                <a:cs typeface="Calibri" pitchFamily="34" charset="-120"/>
-              </a:rPr>
-              <a:t>accelerates ambitions</a:t>
-            </a:r>
-            <a:endParaRPr lang="en-US" sz="1100" dirty="0"/>
-          </a:p>
-        </p:txBody>
-      </p:sp>
-      <p:sp>
-        <p:nvSpPr>
-          <p:cNvPr id="11" name="Shape 9"/>
-          <p:cNvSpPr/>
-          <p:nvPr/>
-        </p:nvSpPr>
-        <p:spPr>
-          <a:xfrm>
-            <a:off x="3657600" y="2414016"/>
-            <a:ext cx="292608" cy="292608"/>
-          </a:xfrm>
-          <a:prstGeom prst="ellipse">
-            <a:avLst/>
-          </a:prstGeom>
-          <a:solidFill>
-            <a:srgbClr val="028090"/>
-          </a:solidFill>
-          <a:ln w="19050">
-            <a:solidFill>
-              <a:srgbClr val="02C39A"/>
-            </a:solidFill>
-            <a:prstDash val="solid"/>
-          </a:ln>
-        </p:spPr>
-      </p:sp>
-      <p:sp>
-        <p:nvSpPr>
-          <p:cNvPr id="12" name="Text 10"/>
-          <p:cNvSpPr/>
-          <p:nvPr/>
-        </p:nvSpPr>
-        <p:spPr>
-          <a:xfrm>
-            <a:off x="3346704" y="1874520"/>
-            <a:ext cx="914400" cy="320040"/>
-          </a:xfrm>
-          <a:prstGeom prst="rect">
-            <a:avLst/>
-          </a:prstGeom>
-          <a:noFill/>
-          <a:ln/>
-        </p:spPr>
-        <p:txBody>
-          <a:bodyPr wrap="square" lIns="0" tIns="0" rIns="0" bIns="0" rtlCol="0" anchor="ctr"/>
-          <a:lstStyle/>
-          <a:p>
-            <a:pPr algn="ctr" indent="0" marL="0">
-              <a:buNone/>
-            </a:pPr>
-            <a:r>
-              <a:rPr lang="en-US" sz="1600" b="1" dirty="0">
-                <a:solidFill>
-                  <a:srgbClr val="02C39A"/>
-                </a:solidFill>
-                <a:latin typeface="Georgia" pitchFamily="34" charset="0"/>
-                <a:ea typeface="Georgia" pitchFamily="34" charset="-122"/>
-                <a:cs typeface="Georgia" pitchFamily="34" charset="-120"/>
-              </a:rPr>
-              <a:t>2025</a:t>
-            </a:r>
-            <a:endParaRPr lang="en-US" sz="1600" dirty="0"/>
-          </a:p>
-        </p:txBody>
-      </p:sp>
-      <p:sp>
-        <p:nvSpPr>
-          <p:cNvPr id="13" name="Text 11"/>
-          <p:cNvSpPr/>
-          <p:nvPr/>
-        </p:nvSpPr>
-        <p:spPr>
-          <a:xfrm>
-            <a:off x="3163824" y="2834640"/>
-            <a:ext cx="1280160" cy="685800"/>
-          </a:xfrm>
-          <a:prstGeom prst="rect">
-            <a:avLst/>
-          </a:prstGeom>
-          <a:noFill/>
-          <a:ln/>
-        </p:spPr>
-        <p:txBody>
-          <a:bodyPr wrap="square" lIns="0" tIns="0" rIns="0" bIns="0" rtlCol="0" anchor="t"/>
-          <a:lstStyle/>
-          <a:p>
-            <a:pPr algn="ctr" indent="0" marL="0">
-              <a:buNone/>
-            </a:pPr>
-            <a:r>
-              <a:rPr lang="en-US" sz="1100" dirty="0">
-                <a:solidFill>
-                  <a:srgbClr val="CCCCCC"/>
-                </a:solidFill>
-                <a:latin typeface="Calibri" pitchFamily="34" charset="0"/>
-                <a:ea typeface="Calibri" pitchFamily="34" charset="-122"/>
-                <a:cs typeface="Calibri" pitchFamily="34" charset="-120"/>
-              </a:rPr>
-              <a:t>First green H2</a:t>
-            </a:r>
-            <a:endParaRPr lang="en-US" sz="1100" dirty="0"/>
-          </a:p>
-          <a:p>
-            <a:pPr algn="ctr" indent="0" marL="0">
-              <a:buNone/>
-            </a:pPr>
-            <a:r>
-              <a:rPr lang="en-US" sz="1100" dirty="0">
-                <a:solidFill>
-                  <a:srgbClr val="CCCCCC"/>
-                </a:solidFill>
-                <a:latin typeface="Calibri" pitchFamily="34" charset="0"/>
-                <a:ea typeface="Calibri" pitchFamily="34" charset="-122"/>
-                <a:cs typeface="Calibri" pitchFamily="34" charset="-120"/>
-              </a:rPr>
-              <a:t>hubs operational</a:t>
-            </a:r>
-            <a:endParaRPr lang="en-US" sz="1100" dirty="0"/>
-          </a:p>
-        </p:txBody>
-      </p:sp>
-      <p:sp>
-        <p:nvSpPr>
-          <p:cNvPr id="14" name="Shape 12"/>
-          <p:cNvSpPr/>
-          <p:nvPr/>
-        </p:nvSpPr>
-        <p:spPr>
-          <a:xfrm>
-            <a:off x="5193792" y="2414016"/>
-            <a:ext cx="292608" cy="292608"/>
-          </a:xfrm>
-          <a:prstGeom prst="ellipse">
-            <a:avLst/>
-          </a:prstGeom>
-          <a:solidFill>
-            <a:srgbClr val="028090"/>
-          </a:solidFill>
-          <a:ln w="19050">
-            <a:solidFill>
-              <a:srgbClr val="02C39A"/>
-            </a:solidFill>
-            <a:prstDash val="solid"/>
-          </a:ln>
-        </p:spPr>
-      </p:sp>
-      <p:sp>
-        <p:nvSpPr>
-          <p:cNvPr id="15" name="Text 13"/>
-          <p:cNvSpPr/>
-          <p:nvPr/>
-        </p:nvSpPr>
-        <p:spPr>
-          <a:xfrm>
-            <a:off x="4882896" y="1874520"/>
-            <a:ext cx="914400" cy="320040"/>
-          </a:xfrm>
-          <a:prstGeom prst="rect">
-            <a:avLst/>
-          </a:prstGeom>
-          <a:noFill/>
-          <a:ln/>
-        </p:spPr>
-        <p:txBody>
-          <a:bodyPr wrap="square" lIns="0" tIns="0" rIns="0" bIns="0" rtlCol="0" anchor="ctr"/>
-          <a:lstStyle/>
-          <a:p>
-            <a:pPr algn="ctr" indent="0" marL="0">
-              <a:buNone/>
-            </a:pPr>
-            <a:r>
-              <a:rPr lang="en-US" sz="1600" b="1" dirty="0">
-                <a:solidFill>
-                  <a:srgbClr val="02C39A"/>
-                </a:solidFill>
-                <a:latin typeface="Georgia" pitchFamily="34" charset="0"/>
-                <a:ea typeface="Georgia" pitchFamily="34" charset="-122"/>
-                <a:cs typeface="Georgia" pitchFamily="34" charset="-120"/>
-              </a:rPr>
-              <a:t>2028</a:t>
-            </a:r>
-            <a:endParaRPr lang="en-US" sz="1600" dirty="0"/>
-          </a:p>
-        </p:txBody>
-      </p:sp>
-      <p:sp>
-        <p:nvSpPr>
-          <p:cNvPr id="16" name="Text 14"/>
-          <p:cNvSpPr/>
-          <p:nvPr/>
-        </p:nvSpPr>
-        <p:spPr>
-          <a:xfrm>
-            <a:off x="4700016" y="2834640"/>
-            <a:ext cx="1280160" cy="685800"/>
-          </a:xfrm>
-          <a:prstGeom prst="rect">
-            <a:avLst/>
-          </a:prstGeom>
-          <a:noFill/>
-          <a:ln/>
-        </p:spPr>
-        <p:txBody>
-          <a:bodyPr wrap="square" lIns="0" tIns="0" rIns="0" bIns="0" rtlCol="0" anchor="t"/>
-          <a:lstStyle/>
-          <a:p>
-            <a:pPr algn="ctr" indent="0" marL="0">
-              <a:buNone/>
-            </a:pPr>
-            <a:r>
-              <a:rPr lang="en-US" sz="1100" dirty="0">
-                <a:solidFill>
-                  <a:srgbClr val="CCCCCC"/>
-                </a:solidFill>
-                <a:latin typeface="Calibri" pitchFamily="34" charset="0"/>
-                <a:ea typeface="Calibri" pitchFamily="34" charset="-122"/>
-                <a:cs typeface="Calibri" pitchFamily="34" charset="-120"/>
-              </a:rPr>
-              <a:t>HyNetwork backbone</a:t>
-            </a:r>
-            <a:endParaRPr lang="en-US" sz="1100" dirty="0"/>
-          </a:p>
-          <a:p>
-            <a:pPr algn="ctr" indent="0" marL="0">
-              <a:buNone/>
-            </a:pPr>
-            <a:r>
-              <a:rPr lang="en-US" sz="1100" dirty="0">
-                <a:solidFill>
-                  <a:srgbClr val="CCCCCC"/>
-                </a:solidFill>
-                <a:latin typeface="Calibri" pitchFamily="34" charset="0"/>
-                <a:ea typeface="Calibri" pitchFamily="34" charset="-122"/>
-                <a:cs typeface="Calibri" pitchFamily="34" charset="-120"/>
-              </a:rPr>
-              <a:t>pipeline live</a:t>
-            </a:r>
-            <a:endParaRPr lang="en-US" sz="1100" dirty="0"/>
-          </a:p>
-        </p:txBody>
-      </p:sp>
-      <p:sp>
-        <p:nvSpPr>
-          <p:cNvPr id="17" name="Shape 15"/>
-          <p:cNvSpPr/>
-          <p:nvPr/>
-        </p:nvSpPr>
-        <p:spPr>
-          <a:xfrm>
-            <a:off x="6729984" y="2414016"/>
-            <a:ext cx="292608" cy="292608"/>
-          </a:xfrm>
-          <a:prstGeom prst="ellipse">
-            <a:avLst/>
-          </a:prstGeom>
-          <a:solidFill>
-            <a:srgbClr val="028090"/>
-          </a:solidFill>
-          <a:ln w="19050">
-            <a:solidFill>
-              <a:srgbClr val="02C39A"/>
-            </a:solidFill>
-            <a:prstDash val="solid"/>
-          </a:ln>
-        </p:spPr>
-      </p:sp>
-      <p:sp>
-        <p:nvSpPr>
-          <p:cNvPr id="18" name="Text 16"/>
-          <p:cNvSpPr/>
-          <p:nvPr/>
-        </p:nvSpPr>
-        <p:spPr>
-          <a:xfrm>
-            <a:off x="6419088" y="1874520"/>
-            <a:ext cx="914400" cy="320040"/>
-          </a:xfrm>
-          <a:prstGeom prst="rect">
-            <a:avLst/>
-          </a:prstGeom>
-          <a:noFill/>
-          <a:ln/>
-        </p:spPr>
-        <p:txBody>
-          <a:bodyPr wrap="square" lIns="0" tIns="0" rIns="0" bIns="0" rtlCol="0" anchor="ctr"/>
-          <a:lstStyle/>
-          <a:p>
-            <a:pPr algn="ctr" indent="0" marL="0">
-              <a:buNone/>
-            </a:pPr>
-            <a:r>
-              <a:rPr lang="en-US" sz="1600" b="1" dirty="0">
-                <a:solidFill>
-                  <a:srgbClr val="02C39A"/>
-                </a:solidFill>
-                <a:latin typeface="Georgia" pitchFamily="34" charset="0"/>
-                <a:ea typeface="Georgia" pitchFamily="34" charset="-122"/>
-                <a:cs typeface="Georgia" pitchFamily="34" charset="-120"/>
-              </a:rPr>
-              <a:t>2030</a:t>
-            </a:r>
-            <a:endParaRPr lang="en-US" sz="1600" dirty="0"/>
-          </a:p>
-        </p:txBody>
-      </p:sp>
-      <p:sp>
-        <p:nvSpPr>
-          <p:cNvPr id="19" name="Text 17"/>
-          <p:cNvSpPr/>
-          <p:nvPr/>
-        </p:nvSpPr>
-        <p:spPr>
-          <a:xfrm>
-            <a:off x="6236208" y="2834640"/>
-            <a:ext cx="1280160" cy="685800"/>
-          </a:xfrm>
-          <a:prstGeom prst="rect">
-            <a:avLst/>
-          </a:prstGeom>
-          <a:noFill/>
-          <a:ln/>
-        </p:spPr>
-        <p:txBody>
-          <a:bodyPr wrap="square" lIns="0" tIns="0" rIns="0" bIns="0" rtlCol="0" anchor="t"/>
-          <a:lstStyle/>
-          <a:p>
-            <a:pPr algn="ctr" indent="0" marL="0">
-              <a:buNone/>
-            </a:pPr>
-            <a:r>
-              <a:rPr lang="en-US" sz="1100" dirty="0">
-                <a:solidFill>
-                  <a:srgbClr val="CCCCCC"/>
-                </a:solidFill>
-                <a:latin typeface="Calibri" pitchFamily="34" charset="0"/>
-                <a:ea typeface="Calibri" pitchFamily="34" charset="-122"/>
-                <a:cs typeface="Calibri" pitchFamily="34" charset="-120"/>
-              </a:rPr>
-              <a:t>Scale-up phase</a:t>
-            </a:r>
-            <a:endParaRPr lang="en-US" sz="1100" dirty="0"/>
-          </a:p>
-          <a:p>
-            <a:pPr algn="ctr" indent="0" marL="0">
-              <a:buNone/>
-            </a:pPr>
-            <a:r>
-              <a:rPr lang="en-US" sz="1100" dirty="0">
-                <a:solidFill>
-                  <a:srgbClr val="CCCCCC"/>
-                </a:solidFill>
-                <a:latin typeface="Calibri" pitchFamily="34" charset="0"/>
-                <a:ea typeface="Calibri" pitchFamily="34" charset="-122"/>
-                <a:cs typeface="Calibri" pitchFamily="34" charset="-120"/>
-              </a:rPr>
-              <a:t>complete</a:t>
-            </a:r>
-            <a:endParaRPr lang="en-US" sz="1100" dirty="0"/>
-          </a:p>
-        </p:txBody>
-      </p:sp>
-      <p:sp>
-        <p:nvSpPr>
-          <p:cNvPr id="20" name="Shape 18"/>
-          <p:cNvSpPr/>
-          <p:nvPr/>
-        </p:nvSpPr>
-        <p:spPr>
-          <a:xfrm>
-            <a:off x="8266176" y="2414016"/>
-            <a:ext cx="292608" cy="292608"/>
-          </a:xfrm>
-          <a:prstGeom prst="ellipse">
-            <a:avLst/>
-          </a:prstGeom>
-          <a:solidFill>
-            <a:srgbClr val="028090"/>
-          </a:solidFill>
-          <a:ln w="19050">
-            <a:solidFill>
-              <a:srgbClr val="02C39A"/>
-            </a:solidFill>
-            <a:prstDash val="solid"/>
-          </a:ln>
-        </p:spPr>
-      </p:sp>
-      <p:sp>
-        <p:nvSpPr>
-          <p:cNvPr id="21" name="Text 19"/>
-          <p:cNvSpPr/>
-          <p:nvPr/>
-        </p:nvSpPr>
-        <p:spPr>
-          <a:xfrm>
-            <a:off x="7955280" y="1874520"/>
-            <a:ext cx="914400" cy="320040"/>
-          </a:xfrm>
-          <a:prstGeom prst="rect">
-            <a:avLst/>
-          </a:prstGeom>
-          <a:noFill/>
-          <a:ln/>
-        </p:spPr>
-        <p:txBody>
-          <a:bodyPr wrap="square" lIns="0" tIns="0" rIns="0" bIns="0" rtlCol="0" anchor="ctr"/>
-          <a:lstStyle/>
-          <a:p>
-            <a:pPr algn="ctr" indent="0" marL="0">
-              <a:buNone/>
-            </a:pPr>
-            <a:r>
-              <a:rPr lang="en-US" sz="1600" b="1" dirty="0">
-                <a:solidFill>
-                  <a:srgbClr val="02C39A"/>
-                </a:solidFill>
-                <a:latin typeface="Georgia" pitchFamily="34" charset="0"/>
-                <a:ea typeface="Georgia" pitchFamily="34" charset="-122"/>
-                <a:cs typeface="Georgia" pitchFamily="34" charset="-120"/>
-              </a:rPr>
-              <a:t>2035</a:t>
-            </a:r>
-            <a:endParaRPr lang="en-US" sz="1600" dirty="0"/>
-          </a:p>
-        </p:txBody>
-      </p:sp>
-      <p:sp>
-        <p:nvSpPr>
-          <p:cNvPr id="22" name="Text 20"/>
-          <p:cNvSpPr/>
-          <p:nvPr/>
-        </p:nvSpPr>
-        <p:spPr>
-          <a:xfrm>
-            <a:off x="7772400" y="2834640"/>
-            <a:ext cx="1280160" cy="685800"/>
-          </a:xfrm>
-          <a:prstGeom prst="rect">
-            <a:avLst/>
-          </a:prstGeom>
-          <a:noFill/>
-          <a:ln/>
-        </p:spPr>
-        <p:txBody>
-          <a:bodyPr wrap="square" lIns="0" tIns="0" rIns="0" bIns="0" rtlCol="0" anchor="t"/>
-          <a:lstStyle/>
-          <a:p>
-            <a:pPr algn="ctr" indent="0" marL="0">
-              <a:buNone/>
-            </a:pPr>
-            <a:r>
-              <a:rPr lang="en-US" sz="1100" dirty="0">
-                <a:solidFill>
-                  <a:srgbClr val="CCCCCC"/>
-                </a:solidFill>
-                <a:latin typeface="Calibri" pitchFamily="34" charset="0"/>
-                <a:ea typeface="Calibri" pitchFamily="34" charset="-122"/>
-                <a:cs typeface="Calibri" pitchFamily="34" charset="-120"/>
-              </a:rPr>
-              <a:t>EU hydrogen corridor</a:t>
-            </a:r>
-            <a:endParaRPr lang="en-US" sz="1100" dirty="0"/>
-          </a:p>
-          <a:p>
-            <a:pPr algn="ctr" indent="0" marL="0">
-              <a:buNone/>
-            </a:pPr>
-            <a:r>
-              <a:rPr lang="en-US" sz="1100" dirty="0">
-                <a:solidFill>
-                  <a:srgbClr val="CCCCCC"/>
-                </a:solidFill>
-                <a:latin typeface="Calibri" pitchFamily="34" charset="0"/>
-                <a:ea typeface="Calibri" pitchFamily="34" charset="-122"/>
-                <a:cs typeface="Calibri" pitchFamily="34" charset="-120"/>
-              </a:rPr>
-              <a:t>integration</a:t>
-            </a:r>
-            <a:endParaRPr lang="en-US" sz="1100" dirty="0"/>
-          </a:p>
-        </p:txBody>
-      </p:sp>
-      <p:sp>
-        <p:nvSpPr>
-          <p:cNvPr id="23" name="Shape 21"/>
-          <p:cNvSpPr/>
-          <p:nvPr/>
-        </p:nvSpPr>
-        <p:spPr>
-          <a:xfrm>
-            <a:off x="0" y="4709160"/>
-            <a:ext cx="9144000" cy="434340"/>
-          </a:xfrm>
-          <a:prstGeom prst="rect">
-            <a:avLst/>
-          </a:prstGeom>
-          <a:solidFill>
-            <a:srgbClr val="028090"/>
-          </a:solidFill>
-          <a:ln/>
-        </p:spPr>
-      </p:sp>
-      <p:sp>
-        <p:nvSpPr>
-          <p:cNvPr id="24" name="Text 22"/>
-          <p:cNvSpPr/>
-          <p:nvPr/>
-        </p:nvSpPr>
-        <p:spPr>
-          <a:xfrm>
-            <a:off x="457200" y="4709160"/>
-            <a:ext cx="8229600" cy="434340"/>
-          </a:xfrm>
-          <a:prstGeom prst="rect">
-            <a:avLst/>
-          </a:prstGeom>
-          <a:noFill/>
-          <a:ln/>
-        </p:spPr>
-        <p:txBody>
-          <a:bodyPr wrap="square" lIns="0" tIns="0" rIns="0" bIns="0" rtlCol="0" anchor="ctr"/>
-          <a:lstStyle/>
-          <a:p>
-            <a:pPr algn="ctr" indent="0" marL="0">
-              <a:buNone/>
-            </a:pPr>
-            <a:r>
-              <a:rPr lang="en-US" sz="1000" dirty="0">
-                <a:solidFill>
-                  <a:srgbClr val="FFFFFF"/>
-                </a:solidFill>
-                <a:latin typeface="Calibri" pitchFamily="34" charset="0"/>
-                <a:ea typeface="Calibri" pitchFamily="34" charset="-122"/>
-                <a:cs typeface="Calibri" pitchFamily="34" charset="-120"/>
-              </a:rPr>
-              <a:t>Confidential  |  Dutch Hydrogen Strategy</a:t>
-            </a:r>
-            <a:endParaRPr lang="en-US" sz="1000" dirty="0"/>
+            <a:endParaRPr lang="en-US" sz="800" dirty="0"/>
           </a:p>
         </p:txBody>
       </p:sp>
